--- a/latex/figure/fig5_robustness_missingness.pptx
+++ b/latex/figure/fig5_robustness_missingness.pptx
@@ -7,7 +7,7 @@
   <p:sldIdLst>
     <p:sldId id="256" r:id="rId7"/>
   </p:sldIdLst>
-  <p:sldSz cx="5029200" cy="1955800" type="screen4x3"/>
+  <p:sldSz cx="5029200" cy="2209800" type="screen4x3"/>
   <p:notesSz cx="6858000" cy="9144000"/>
   <p:defaultTextStyle>
     <a:defPPr>
@@ -3131,8 +3131,8 @@
         </p:nvCxnSpPr>
         <p:spPr>
           <a:xfrm>
-            <a:off x="381000" y="1473200"/>
-            <a:ext cx="1219200" cy="0"/>
+            <a:off x="431800" y="1524000"/>
+            <a:ext cx="1168400" cy="0"/>
           </a:xfrm>
           <a:prstGeom prst="line">
             <a:avLst/>
@@ -3166,8 +3166,8 @@
         </p:nvCxnSpPr>
         <p:spPr>
           <a:xfrm>
-            <a:off x="381000" y="381000"/>
-            <a:ext cx="0" cy="1092200"/>
+            <a:off x="431800" y="457200"/>
+            <a:ext cx="0" cy="1066800"/>
           </a:xfrm>
           <a:prstGeom prst="line">
             <a:avLst/>
@@ -3201,7 +3201,7 @@
         </p:nvCxnSpPr>
         <p:spPr>
           <a:xfrm>
-            <a:off x="381000" y="1473200"/>
+            <a:off x="431800" y="1524000"/>
             <a:ext cx="0" cy="31750"/>
           </a:xfrm>
           <a:prstGeom prst="line">
@@ -3236,7 +3236,7 @@
         </p:nvSpPr>
         <p:spPr>
           <a:xfrm>
-            <a:off x="-1143000" y="1494917"/>
+            <a:off x="-1092200" y="1545717"/>
             <a:ext cx="3048000" cy="164592"/>
           </a:xfrm>
           <a:prstGeom prst="rect">
@@ -3271,7 +3271,7 @@
         </p:nvCxnSpPr>
         <p:spPr>
           <a:xfrm>
-            <a:off x="990600" y="1473200"/>
+            <a:off x="1016000" y="1524000"/>
             <a:ext cx="0" cy="31750"/>
           </a:xfrm>
           <a:prstGeom prst="line">
@@ -3306,7 +3306,7 @@
         </p:nvSpPr>
         <p:spPr>
           <a:xfrm>
-            <a:off x="-533400" y="1494917"/>
+            <a:off x="-508000" y="1545717"/>
             <a:ext cx="3048000" cy="164592"/>
           </a:xfrm>
           <a:prstGeom prst="rect">
@@ -3341,7 +3341,7 @@
         </p:nvCxnSpPr>
         <p:spPr>
           <a:xfrm>
-            <a:off x="1600200" y="1473200"/>
+            <a:off x="1600200" y="1524000"/>
             <a:ext cx="0" cy="31750"/>
           </a:xfrm>
           <a:prstGeom prst="line">
@@ -3376,7 +3376,7 @@
         </p:nvSpPr>
         <p:spPr>
           <a:xfrm>
-            <a:off x="76200" y="1494917"/>
+            <a:off x="76200" y="1545717"/>
             <a:ext cx="3048000" cy="164592"/>
           </a:xfrm>
           <a:prstGeom prst="rect">
@@ -3411,7 +3411,7 @@
         </p:nvCxnSpPr>
         <p:spPr>
           <a:xfrm>
-            <a:off x="349250" y="1473200"/>
+            <a:off x="400050" y="1484585"/>
             <a:ext cx="31750" cy="0"/>
           </a:xfrm>
           <a:prstGeom prst="line">
@@ -3446,7 +3446,7 @@
         </p:nvSpPr>
         <p:spPr>
           <a:xfrm>
-            <a:off x="-1188720" y="1404747"/>
+            <a:off x="-1137920" y="1416132"/>
             <a:ext cx="3048000" cy="164592"/>
           </a:xfrm>
           <a:prstGeom prst="rect">
@@ -3468,7 +3468,7 @@
                 </a:solidFill>
                 <a:latin typeface="Helvetica"/>
               </a:rPr>
-              <a:t>0</a:t>
+              <a:t>-20%</a:t>
             </a:r>
           </a:p>
         </p:txBody>
@@ -3481,7 +3481,7 @@
         </p:nvCxnSpPr>
         <p:spPr>
           <a:xfrm>
-            <a:off x="349250" y="927100"/>
+            <a:off x="400050" y="1268734"/>
             <a:ext cx="31750" cy="0"/>
           </a:xfrm>
           <a:prstGeom prst="line">
@@ -3516,7 +3516,7 @@
         </p:nvSpPr>
         <p:spPr>
           <a:xfrm>
-            <a:off x="-1188720" y="858647"/>
+            <a:off x="-1137920" y="1200281"/>
             <a:ext cx="3048000" cy="164592"/>
           </a:xfrm>
           <a:prstGeom prst="rect">
@@ -3538,7 +3538,7 @@
                 </a:solidFill>
                 <a:latin typeface="Helvetica"/>
               </a:rPr>
-              <a:t/>
+              <a:t>-10%</a:t>
             </a:r>
           </a:p>
         </p:txBody>
@@ -3551,7 +3551,7 @@
         </p:nvCxnSpPr>
         <p:spPr>
           <a:xfrm>
-            <a:off x="349250" y="381000"/>
+            <a:off x="400050" y="1052883"/>
             <a:ext cx="31750" cy="0"/>
           </a:xfrm>
           <a:prstGeom prst="line">
@@ -3586,7 +3586,7 @@
         </p:nvSpPr>
         <p:spPr>
           <a:xfrm>
-            <a:off x="-1188720" y="312547"/>
+            <a:off x="-1137920" y="984430"/>
             <a:ext cx="3048000" cy="164592"/>
           </a:xfrm>
           <a:prstGeom prst="rect">
@@ -3608,20 +3608,160 @@
                 </a:solidFill>
                 <a:latin typeface="Helvetica"/>
               </a:rPr>
-              <a:t>+</a:t>
-            </a:r>
-          </a:p>
-        </p:txBody>
-      </p:sp>
-      <p:sp>
-        <p:nvSpPr>
-          <p:cNvPr id="17" name="TextBox 16"/>
+              <a:t>+0%</a:t>
+            </a:r>
+          </a:p>
+        </p:txBody>
+      </p:sp>
+      <p:cxnSp>
+        <p:nvCxnSpPr>
+          <p:cNvPr id="17" name="Connector 16"/>
+          <p:cNvCxnSpPr/>
+          <p:nvPr/>
+        </p:nvCxnSpPr>
+        <p:spPr>
+          <a:xfrm>
+            <a:off x="400050" y="837032"/>
+            <a:ext cx="31750" cy="0"/>
+          </a:xfrm>
+          <a:prstGeom prst="line">
+            <a:avLst/>
+          </a:prstGeom>
+          <a:ln w="7620">
+            <a:solidFill>
+              <a:srgbClr val="1C1E23"/>
+            </a:solidFill>
+          </a:ln>
+        </p:spPr>
+        <p:style>
+          <a:lnRef idx="2">
+            <a:schemeClr val="accent1"/>
+          </a:lnRef>
+          <a:fillRef idx="0">
+            <a:schemeClr val="accent1"/>
+          </a:fillRef>
+          <a:effectRef idx="1">
+            <a:schemeClr val="accent1"/>
+          </a:effectRef>
+          <a:fontRef idx="minor">
+            <a:schemeClr val="tx1"/>
+          </a:fontRef>
+        </p:style>
+      </p:cxnSp>
+      <p:sp>
+        <p:nvSpPr>
+          <p:cNvPr id="18" name="TextBox 17"/>
           <p:cNvSpPr txBox="1"/>
           <p:nvPr/>
         </p:nvSpPr>
         <p:spPr>
           <a:xfrm>
-            <a:off x="-533400" y="1592580"/>
+            <a:off x="-1137920" y="768579"/>
+            <a:ext cx="3048000" cy="164592"/>
+          </a:xfrm>
+          <a:prstGeom prst="rect">
+            <a:avLst/>
+          </a:prstGeom>
+          <a:noFill/>
+        </p:spPr>
+        <p:txBody>
+          <a:bodyPr wrap="none" lIns="0" rIns="0" tIns="0" bIns="0" anchor="ctr">
+            <a:spAutoFit/>
+          </a:bodyPr>
+          <a:lstStyle/>
+          <a:p>
+            <a:pPr algn="r"/>
+            <a:r>
+              <a:rPr sz="540" b="0" i="0">
+                <a:solidFill>
+                  <a:srgbClr val="6B727C"/>
+                </a:solidFill>
+                <a:latin typeface="Helvetica"/>
+              </a:rPr>
+              <a:t>+10%</a:t>
+            </a:r>
+          </a:p>
+        </p:txBody>
+      </p:sp>
+      <p:cxnSp>
+        <p:nvCxnSpPr>
+          <p:cNvPr id="19" name="Connector 18"/>
+          <p:cNvCxnSpPr/>
+          <p:nvPr/>
+        </p:nvCxnSpPr>
+        <p:spPr>
+          <a:xfrm>
+            <a:off x="400050" y="621181"/>
+            <a:ext cx="31750" cy="0"/>
+          </a:xfrm>
+          <a:prstGeom prst="line">
+            <a:avLst/>
+          </a:prstGeom>
+          <a:ln w="7620">
+            <a:solidFill>
+              <a:srgbClr val="1C1E23"/>
+            </a:solidFill>
+          </a:ln>
+        </p:spPr>
+        <p:style>
+          <a:lnRef idx="2">
+            <a:schemeClr val="accent1"/>
+          </a:lnRef>
+          <a:fillRef idx="0">
+            <a:schemeClr val="accent1"/>
+          </a:fillRef>
+          <a:effectRef idx="1">
+            <a:schemeClr val="accent1"/>
+          </a:effectRef>
+          <a:fontRef idx="minor">
+            <a:schemeClr val="tx1"/>
+          </a:fontRef>
+        </p:style>
+      </p:cxnSp>
+      <p:sp>
+        <p:nvSpPr>
+          <p:cNvPr id="20" name="TextBox 19"/>
+          <p:cNvSpPr txBox="1"/>
+          <p:nvPr/>
+        </p:nvSpPr>
+        <p:spPr>
+          <a:xfrm>
+            <a:off x="-1137920" y="552728"/>
+            <a:ext cx="3048000" cy="164592"/>
+          </a:xfrm>
+          <a:prstGeom prst="rect">
+            <a:avLst/>
+          </a:prstGeom>
+          <a:noFill/>
+        </p:spPr>
+        <p:txBody>
+          <a:bodyPr wrap="none" lIns="0" rIns="0" tIns="0" bIns="0" anchor="ctr">
+            <a:spAutoFit/>
+          </a:bodyPr>
+          <a:lstStyle/>
+          <a:p>
+            <a:pPr algn="r"/>
+            <a:r>
+              <a:rPr sz="540" b="0" i="0">
+                <a:solidFill>
+                  <a:srgbClr val="6B727C"/>
+                </a:solidFill>
+                <a:latin typeface="Helvetica"/>
+              </a:rPr>
+              <a:t>+20%</a:t>
+            </a:r>
+          </a:p>
+        </p:txBody>
+      </p:sp>
+      <p:sp>
+        <p:nvSpPr>
+          <p:cNvPr id="21" name="TextBox 20"/>
+          <p:cNvSpPr txBox="1"/>
+          <p:nvPr/>
+        </p:nvSpPr>
+        <p:spPr>
+          <a:xfrm>
+            <a:off x="-508000" y="1643380"/>
             <a:ext cx="3048000" cy="182879"/>
           </a:xfrm>
           <a:prstGeom prst="rect">
@@ -3650,13 +3790,13 @@
       </p:sp>
       <p:sp>
         <p:nvSpPr>
-          <p:cNvPr id="18" name="TextBox 17"/>
+          <p:cNvPr id="22" name="TextBox 21"/>
           <p:cNvSpPr txBox="1"/>
           <p:nvPr/>
         </p:nvSpPr>
         <p:spPr>
           <a:xfrm>
-            <a:off x="-1181100" y="224917"/>
+            <a:off x="-1130300" y="301117"/>
             <a:ext cx="3048000" cy="164592"/>
           </a:xfrm>
           <a:prstGeom prst="rect">
@@ -3678,21 +3818,21 @@
                 </a:solidFill>
                 <a:latin typeface="Helvetica"/>
               </a:rPr>
-              <a:t>relative MASE improvement vs KEEP</a:t>
+              <a:t>MASE improvement over the untouched input</a:t>
             </a:r>
           </a:p>
         </p:txBody>
       </p:sp>
       <p:cxnSp>
         <p:nvCxnSpPr>
-          <p:cNvPr id="19" name="Connector 18"/>
+          <p:cNvPr id="23" name="Connector 22"/>
           <p:cNvCxnSpPr/>
           <p:nvPr/>
         </p:nvCxnSpPr>
         <p:spPr>
           <a:xfrm>
-            <a:off x="381000" y="839724"/>
-            <a:ext cx="1219200" cy="0"/>
+            <a:off x="431800" y="1052883"/>
+            <a:ext cx="1168400" cy="0"/>
           </a:xfrm>
           <a:prstGeom prst="line">
             <a:avLst/>
@@ -3721,42 +3861,1002 @@
       </p:cxnSp>
       <p:sp>
         <p:nvSpPr>
-          <p:cNvPr id="20" name="TextBox 19"/>
-          <p:cNvSpPr txBox="1"/>
-          <p:nvPr/>
-        </p:nvSpPr>
-        <p:spPr>
-          <a:xfrm>
-            <a:off x="-533400" y="1059688"/>
-            <a:ext cx="3048000" cy="170688"/>
-          </a:xfrm>
-          <a:prstGeom prst="rect">
-            <a:avLst/>
-          </a:prstGeom>
+          <p:cNvPr id="24" name="Freeform 23"/>
+          <p:cNvSpPr/>
+          <p:nvPr/>
+        </p:nvSpPr>
+        <p:spPr>
+          <a:xfrm>
+            <a:off x="431800" y="684398"/>
+            <a:ext cx="1168400" cy="220975"/>
+          </a:xfrm>
+          <a:custGeom>
+            <a:avLst/>
+            <a:gdLst/>
+            <a:ahLst/>
+            <a:cxnLst/>
+            <a:rect l="l" t="t" r="r" b="b"/>
+            <a:pathLst>
+              <a:path w="1168400" h="220975">
+                <a:moveTo>
+                  <a:pt x="0" y="220975"/>
+                </a:moveTo>
+                <a:lnTo>
+                  <a:pt x="584200" y="108697"/>
+                </a:lnTo>
+                <a:lnTo>
+                  <a:pt x="1168400" y="0"/>
+                </a:lnTo>
+              </a:path>
+            </a:pathLst>
+          </a:custGeom>
           <a:noFill/>
-        </p:spPr>
-        <p:txBody>
-          <a:bodyPr wrap="none" lIns="0" rIns="0" tIns="0" bIns="0" anchor="ctr">
-            <a:spAutoFit/>
-          </a:bodyPr>
+          <a:ln w="17780">
+            <a:solidFill>
+              <a:srgbClr val="215499"/>
+            </a:solidFill>
+          </a:ln>
+          <a:effectLst/>
+        </p:spPr>
+        <p:style>
+          <a:lnRef idx="1">
+            <a:schemeClr val="accent1"/>
+          </a:lnRef>
+          <a:fillRef idx="3">
+            <a:schemeClr val="accent1"/>
+          </a:fillRef>
+          <a:effectRef idx="2">
+            <a:schemeClr val="accent1"/>
+          </a:effectRef>
+          <a:fontRef idx="minor">
+            <a:schemeClr val="lt1"/>
+          </a:fontRef>
+        </p:style>
+        <p:txBody>
+          <a:bodyPr rtlCol="0" anchor="ctr"/>
           <a:lstStyle/>
           <a:p>
             <a:pPr algn="ctr"/>
-            <a:r>
-              <a:rPr sz="560" b="0" i="0">
-                <a:solidFill>
-                  <a:srgbClr val="AD2B2B"/>
-                </a:solidFill>
-                <a:latin typeface="Helvetica"/>
-              </a:rPr>
-              <a:t>[FIG-ROBUST-BOLT]</a:t>
-            </a:r>
-          </a:p>
-        </p:txBody>
-      </p:sp>
-      <p:sp>
-        <p:nvSpPr>
-          <p:cNvPr id="21" name="TextBox 20"/>
+          </a:p>
+        </p:txBody>
+      </p:sp>
+      <p:sp>
+        <p:nvSpPr>
+          <p:cNvPr id="25" name="Rectangle 24"/>
+          <p:cNvSpPr/>
+          <p:nvPr/>
+        </p:nvSpPr>
+        <p:spPr>
+          <a:xfrm>
+            <a:off x="415290" y="888863"/>
+            <a:ext cx="33020" cy="33020"/>
+          </a:xfrm>
+          <a:prstGeom prst="rect">
+            <a:avLst/>
+          </a:prstGeom>
+          <a:solidFill>
+            <a:srgbClr val="215499"/>
+          </a:solidFill>
+          <a:ln w="6350">
+            <a:solidFill>
+              <a:srgbClr val="FFFFFF"/>
+            </a:solidFill>
+          </a:ln>
+          <a:effectLst/>
+        </p:spPr>
+        <p:style>
+          <a:lnRef idx="1">
+            <a:schemeClr val="accent1"/>
+          </a:lnRef>
+          <a:fillRef idx="3">
+            <a:schemeClr val="accent1"/>
+          </a:fillRef>
+          <a:effectRef idx="2">
+            <a:schemeClr val="accent1"/>
+          </a:effectRef>
+          <a:fontRef idx="minor">
+            <a:schemeClr val="lt1"/>
+          </a:fontRef>
+        </p:style>
+        <p:txBody>
+          <a:bodyPr rtlCol="0" anchor="ctr"/>
+          <a:lstStyle/>
+          <a:p>
+            <a:pPr algn="ctr"/>
+          </a:p>
+        </p:txBody>
+      </p:sp>
+      <p:sp>
+        <p:nvSpPr>
+          <p:cNvPr id="26" name="Rectangle 25"/>
+          <p:cNvSpPr/>
+          <p:nvPr/>
+        </p:nvSpPr>
+        <p:spPr>
+          <a:xfrm>
+            <a:off x="999490" y="776585"/>
+            <a:ext cx="33020" cy="33020"/>
+          </a:xfrm>
+          <a:prstGeom prst="rect">
+            <a:avLst/>
+          </a:prstGeom>
+          <a:solidFill>
+            <a:srgbClr val="215499"/>
+          </a:solidFill>
+          <a:ln w="6350">
+            <a:solidFill>
+              <a:srgbClr val="FFFFFF"/>
+            </a:solidFill>
+          </a:ln>
+          <a:effectLst/>
+        </p:spPr>
+        <p:style>
+          <a:lnRef idx="1">
+            <a:schemeClr val="accent1"/>
+          </a:lnRef>
+          <a:fillRef idx="3">
+            <a:schemeClr val="accent1"/>
+          </a:fillRef>
+          <a:effectRef idx="2">
+            <a:schemeClr val="accent1"/>
+          </a:effectRef>
+          <a:fontRef idx="minor">
+            <a:schemeClr val="lt1"/>
+          </a:fontRef>
+        </p:style>
+        <p:txBody>
+          <a:bodyPr rtlCol="0" anchor="ctr"/>
+          <a:lstStyle/>
+          <a:p>
+            <a:pPr algn="ctr"/>
+          </a:p>
+        </p:txBody>
+      </p:sp>
+      <p:sp>
+        <p:nvSpPr>
+          <p:cNvPr id="27" name="Rectangle 26"/>
+          <p:cNvSpPr/>
+          <p:nvPr/>
+        </p:nvSpPr>
+        <p:spPr>
+          <a:xfrm>
+            <a:off x="1583690" y="667888"/>
+            <a:ext cx="33020" cy="33020"/>
+          </a:xfrm>
+          <a:prstGeom prst="rect">
+            <a:avLst/>
+          </a:prstGeom>
+          <a:solidFill>
+            <a:srgbClr val="215499"/>
+          </a:solidFill>
+          <a:ln w="6350">
+            <a:solidFill>
+              <a:srgbClr val="FFFFFF"/>
+            </a:solidFill>
+          </a:ln>
+          <a:effectLst/>
+        </p:spPr>
+        <p:style>
+          <a:lnRef idx="1">
+            <a:schemeClr val="accent1"/>
+          </a:lnRef>
+          <a:fillRef idx="3">
+            <a:schemeClr val="accent1"/>
+          </a:fillRef>
+          <a:effectRef idx="2">
+            <a:schemeClr val="accent1"/>
+          </a:effectRef>
+          <a:fontRef idx="minor">
+            <a:schemeClr val="lt1"/>
+          </a:fontRef>
+        </p:style>
+        <p:txBody>
+          <a:bodyPr rtlCol="0" anchor="ctr"/>
+          <a:lstStyle/>
+          <a:p>
+            <a:pPr algn="ctr"/>
+          </a:p>
+        </p:txBody>
+      </p:sp>
+      <p:sp>
+        <p:nvSpPr>
+          <p:cNvPr id="28" name="Freeform 27"/>
+          <p:cNvSpPr/>
+          <p:nvPr/>
+        </p:nvSpPr>
+        <p:spPr>
+          <a:xfrm>
+            <a:off x="431800" y="838213"/>
+            <a:ext cx="1168400" cy="146592"/>
+          </a:xfrm>
+          <a:custGeom>
+            <a:avLst/>
+            <a:gdLst/>
+            <a:ahLst/>
+            <a:cxnLst/>
+            <a:rect l="l" t="t" r="r" b="b"/>
+            <a:pathLst>
+              <a:path w="1168400" h="146592">
+                <a:moveTo>
+                  <a:pt x="0" y="95802"/>
+                </a:moveTo>
+                <a:lnTo>
+                  <a:pt x="584200" y="0"/>
+                </a:lnTo>
+                <a:lnTo>
+                  <a:pt x="1168400" y="146592"/>
+                </a:lnTo>
+              </a:path>
+            </a:pathLst>
+          </a:custGeom>
+          <a:noFill/>
+          <a:ln w="10160">
+            <a:solidFill>
+              <a:srgbClr val="AD6B0A"/>
+            </a:solidFill>
+          </a:ln>
+          <a:effectLst/>
+        </p:spPr>
+        <p:style>
+          <a:lnRef idx="1">
+            <a:schemeClr val="accent1"/>
+          </a:lnRef>
+          <a:fillRef idx="3">
+            <a:schemeClr val="accent1"/>
+          </a:fillRef>
+          <a:effectRef idx="2">
+            <a:schemeClr val="accent1"/>
+          </a:effectRef>
+          <a:fontRef idx="minor">
+            <a:schemeClr val="lt1"/>
+          </a:fontRef>
+        </p:style>
+        <p:txBody>
+          <a:bodyPr rtlCol="0" anchor="ctr"/>
+          <a:lstStyle/>
+          <a:p>
+            <a:pPr algn="ctr"/>
+          </a:p>
+        </p:txBody>
+      </p:sp>
+      <p:sp>
+        <p:nvSpPr>
+          <p:cNvPr id="29" name="Rectangle 28"/>
+          <p:cNvSpPr/>
+          <p:nvPr/>
+        </p:nvSpPr>
+        <p:spPr>
+          <a:xfrm>
+            <a:off x="415290" y="917505"/>
+            <a:ext cx="33020" cy="33020"/>
+          </a:xfrm>
+          <a:prstGeom prst="rect">
+            <a:avLst/>
+          </a:prstGeom>
+          <a:solidFill>
+            <a:srgbClr val="AD6B0A"/>
+          </a:solidFill>
+          <a:ln w="6350">
+            <a:solidFill>
+              <a:srgbClr val="FFFFFF"/>
+            </a:solidFill>
+          </a:ln>
+          <a:effectLst/>
+        </p:spPr>
+        <p:style>
+          <a:lnRef idx="1">
+            <a:schemeClr val="accent1"/>
+          </a:lnRef>
+          <a:fillRef idx="3">
+            <a:schemeClr val="accent1"/>
+          </a:fillRef>
+          <a:effectRef idx="2">
+            <a:schemeClr val="accent1"/>
+          </a:effectRef>
+          <a:fontRef idx="minor">
+            <a:schemeClr val="lt1"/>
+          </a:fontRef>
+        </p:style>
+        <p:txBody>
+          <a:bodyPr rtlCol="0" anchor="ctr"/>
+          <a:lstStyle/>
+          <a:p>
+            <a:pPr algn="ctr"/>
+          </a:p>
+        </p:txBody>
+      </p:sp>
+      <p:sp>
+        <p:nvSpPr>
+          <p:cNvPr id="30" name="Rectangle 29"/>
+          <p:cNvSpPr/>
+          <p:nvPr/>
+        </p:nvSpPr>
+        <p:spPr>
+          <a:xfrm>
+            <a:off x="999490" y="821703"/>
+            <a:ext cx="33020" cy="33020"/>
+          </a:xfrm>
+          <a:prstGeom prst="rect">
+            <a:avLst/>
+          </a:prstGeom>
+          <a:solidFill>
+            <a:srgbClr val="AD6B0A"/>
+          </a:solidFill>
+          <a:ln w="6350">
+            <a:solidFill>
+              <a:srgbClr val="FFFFFF"/>
+            </a:solidFill>
+          </a:ln>
+          <a:effectLst/>
+        </p:spPr>
+        <p:style>
+          <a:lnRef idx="1">
+            <a:schemeClr val="accent1"/>
+          </a:lnRef>
+          <a:fillRef idx="3">
+            <a:schemeClr val="accent1"/>
+          </a:fillRef>
+          <a:effectRef idx="2">
+            <a:schemeClr val="accent1"/>
+          </a:effectRef>
+          <a:fontRef idx="minor">
+            <a:schemeClr val="lt1"/>
+          </a:fontRef>
+        </p:style>
+        <p:txBody>
+          <a:bodyPr rtlCol="0" anchor="ctr"/>
+          <a:lstStyle/>
+          <a:p>
+            <a:pPr algn="ctr"/>
+          </a:p>
+        </p:txBody>
+      </p:sp>
+      <p:sp>
+        <p:nvSpPr>
+          <p:cNvPr id="31" name="Rectangle 30"/>
+          <p:cNvSpPr/>
+          <p:nvPr/>
+        </p:nvSpPr>
+        <p:spPr>
+          <a:xfrm>
+            <a:off x="1583690" y="968295"/>
+            <a:ext cx="33020" cy="33020"/>
+          </a:xfrm>
+          <a:prstGeom prst="rect">
+            <a:avLst/>
+          </a:prstGeom>
+          <a:solidFill>
+            <a:srgbClr val="AD6B0A"/>
+          </a:solidFill>
+          <a:ln w="6350">
+            <a:solidFill>
+              <a:srgbClr val="FFFFFF"/>
+            </a:solidFill>
+          </a:ln>
+          <a:effectLst/>
+        </p:spPr>
+        <p:style>
+          <a:lnRef idx="1">
+            <a:schemeClr val="accent1"/>
+          </a:lnRef>
+          <a:fillRef idx="3">
+            <a:schemeClr val="accent1"/>
+          </a:fillRef>
+          <a:effectRef idx="2">
+            <a:schemeClr val="accent1"/>
+          </a:effectRef>
+          <a:fontRef idx="minor">
+            <a:schemeClr val="lt1"/>
+          </a:fontRef>
+        </p:style>
+        <p:txBody>
+          <a:bodyPr rtlCol="0" anchor="ctr"/>
+          <a:lstStyle/>
+          <a:p>
+            <a:pPr algn="ctr"/>
+          </a:p>
+        </p:txBody>
+      </p:sp>
+      <p:sp>
+        <p:nvSpPr>
+          <p:cNvPr id="32" name="Freeform 31"/>
+          <p:cNvSpPr/>
+          <p:nvPr/>
+        </p:nvSpPr>
+        <p:spPr>
+          <a:xfrm>
+            <a:off x="431800" y="678151"/>
+            <a:ext cx="1168400" cy="249460"/>
+          </a:xfrm>
+          <a:custGeom>
+            <a:avLst/>
+            <a:gdLst/>
+            <a:ahLst/>
+            <a:cxnLst/>
+            <a:rect l="l" t="t" r="r" b="b"/>
+            <a:pathLst>
+              <a:path w="1168400" h="249460">
+                <a:moveTo>
+                  <a:pt x="0" y="240319"/>
+                </a:moveTo>
+                <a:lnTo>
+                  <a:pt x="584200" y="0"/>
+                </a:lnTo>
+                <a:lnTo>
+                  <a:pt x="1168400" y="249460"/>
+                </a:lnTo>
+              </a:path>
+            </a:pathLst>
+          </a:custGeom>
+          <a:noFill/>
+          <a:ln w="10160">
+            <a:solidFill>
+              <a:srgbClr val="19704F"/>
+            </a:solidFill>
+          </a:ln>
+          <a:effectLst/>
+        </p:spPr>
+        <p:style>
+          <a:lnRef idx="1">
+            <a:schemeClr val="accent1"/>
+          </a:lnRef>
+          <a:fillRef idx="3">
+            <a:schemeClr val="accent1"/>
+          </a:fillRef>
+          <a:effectRef idx="2">
+            <a:schemeClr val="accent1"/>
+          </a:effectRef>
+          <a:fontRef idx="minor">
+            <a:schemeClr val="lt1"/>
+          </a:fontRef>
+        </p:style>
+        <p:txBody>
+          <a:bodyPr rtlCol="0" anchor="ctr"/>
+          <a:lstStyle/>
+          <a:p>
+            <a:pPr algn="ctr"/>
+          </a:p>
+        </p:txBody>
+      </p:sp>
+      <p:sp>
+        <p:nvSpPr>
+          <p:cNvPr id="33" name="Rectangle 32"/>
+          <p:cNvSpPr/>
+          <p:nvPr/>
+        </p:nvSpPr>
+        <p:spPr>
+          <a:xfrm>
+            <a:off x="415290" y="901960"/>
+            <a:ext cx="33020" cy="33020"/>
+          </a:xfrm>
+          <a:prstGeom prst="rect">
+            <a:avLst/>
+          </a:prstGeom>
+          <a:solidFill>
+            <a:srgbClr val="19704F"/>
+          </a:solidFill>
+          <a:ln w="6350">
+            <a:solidFill>
+              <a:srgbClr val="FFFFFF"/>
+            </a:solidFill>
+          </a:ln>
+          <a:effectLst/>
+        </p:spPr>
+        <p:style>
+          <a:lnRef idx="1">
+            <a:schemeClr val="accent1"/>
+          </a:lnRef>
+          <a:fillRef idx="3">
+            <a:schemeClr val="accent1"/>
+          </a:fillRef>
+          <a:effectRef idx="2">
+            <a:schemeClr val="accent1"/>
+          </a:effectRef>
+          <a:fontRef idx="minor">
+            <a:schemeClr val="lt1"/>
+          </a:fontRef>
+        </p:style>
+        <p:txBody>
+          <a:bodyPr rtlCol="0" anchor="ctr"/>
+          <a:lstStyle/>
+          <a:p>
+            <a:pPr algn="ctr"/>
+          </a:p>
+        </p:txBody>
+      </p:sp>
+      <p:sp>
+        <p:nvSpPr>
+          <p:cNvPr id="34" name="Rectangle 33"/>
+          <p:cNvSpPr/>
+          <p:nvPr/>
+        </p:nvSpPr>
+        <p:spPr>
+          <a:xfrm>
+            <a:off x="999490" y="661641"/>
+            <a:ext cx="33020" cy="33020"/>
+          </a:xfrm>
+          <a:prstGeom prst="rect">
+            <a:avLst/>
+          </a:prstGeom>
+          <a:solidFill>
+            <a:srgbClr val="19704F"/>
+          </a:solidFill>
+          <a:ln w="6350">
+            <a:solidFill>
+              <a:srgbClr val="FFFFFF"/>
+            </a:solidFill>
+          </a:ln>
+          <a:effectLst/>
+        </p:spPr>
+        <p:style>
+          <a:lnRef idx="1">
+            <a:schemeClr val="accent1"/>
+          </a:lnRef>
+          <a:fillRef idx="3">
+            <a:schemeClr val="accent1"/>
+          </a:fillRef>
+          <a:effectRef idx="2">
+            <a:schemeClr val="accent1"/>
+          </a:effectRef>
+          <a:fontRef idx="minor">
+            <a:schemeClr val="lt1"/>
+          </a:fontRef>
+        </p:style>
+        <p:txBody>
+          <a:bodyPr rtlCol="0" anchor="ctr"/>
+          <a:lstStyle/>
+          <a:p>
+            <a:pPr algn="ctr"/>
+          </a:p>
+        </p:txBody>
+      </p:sp>
+      <p:sp>
+        <p:nvSpPr>
+          <p:cNvPr id="35" name="Rectangle 34"/>
+          <p:cNvSpPr/>
+          <p:nvPr/>
+        </p:nvSpPr>
+        <p:spPr>
+          <a:xfrm>
+            <a:off x="1583690" y="911101"/>
+            <a:ext cx="33020" cy="33020"/>
+          </a:xfrm>
+          <a:prstGeom prst="rect">
+            <a:avLst/>
+          </a:prstGeom>
+          <a:solidFill>
+            <a:srgbClr val="19704F"/>
+          </a:solidFill>
+          <a:ln w="6350">
+            <a:solidFill>
+              <a:srgbClr val="FFFFFF"/>
+            </a:solidFill>
+          </a:ln>
+          <a:effectLst/>
+        </p:spPr>
+        <p:style>
+          <a:lnRef idx="1">
+            <a:schemeClr val="accent1"/>
+          </a:lnRef>
+          <a:fillRef idx="3">
+            <a:schemeClr val="accent1"/>
+          </a:fillRef>
+          <a:effectRef idx="2">
+            <a:schemeClr val="accent1"/>
+          </a:effectRef>
+          <a:fontRef idx="minor">
+            <a:schemeClr val="lt1"/>
+          </a:fontRef>
+        </p:style>
+        <p:txBody>
+          <a:bodyPr rtlCol="0" anchor="ctr"/>
+          <a:lstStyle/>
+          <a:p>
+            <a:pPr algn="ctr"/>
+          </a:p>
+        </p:txBody>
+      </p:sp>
+      <p:sp>
+        <p:nvSpPr>
+          <p:cNvPr id="36" name="Freeform 35"/>
+          <p:cNvSpPr/>
+          <p:nvPr/>
+        </p:nvSpPr>
+        <p:spPr>
+          <a:xfrm>
+            <a:off x="431800" y="1041503"/>
+            <a:ext cx="1168400" cy="315296"/>
+          </a:xfrm>
+          <a:custGeom>
+            <a:avLst/>
+            <a:gdLst/>
+            <a:ahLst/>
+            <a:cxnLst/>
+            <a:rect l="l" t="t" r="r" b="b"/>
+            <a:pathLst>
+              <a:path w="1168400" h="315296">
+                <a:moveTo>
+                  <a:pt x="0" y="315296"/>
+                </a:moveTo>
+                <a:lnTo>
+                  <a:pt x="584200" y="13789"/>
+                </a:lnTo>
+                <a:lnTo>
+                  <a:pt x="1168400" y="0"/>
+                </a:lnTo>
+              </a:path>
+            </a:pathLst>
+          </a:custGeom>
+          <a:noFill/>
+          <a:ln w="10160">
+            <a:solidFill>
+              <a:srgbClr val="AD2B2B"/>
+            </a:solidFill>
+          </a:ln>
+          <a:effectLst/>
+        </p:spPr>
+        <p:style>
+          <a:lnRef idx="1">
+            <a:schemeClr val="accent1"/>
+          </a:lnRef>
+          <a:fillRef idx="3">
+            <a:schemeClr val="accent1"/>
+          </a:fillRef>
+          <a:effectRef idx="2">
+            <a:schemeClr val="accent1"/>
+          </a:effectRef>
+          <a:fontRef idx="minor">
+            <a:schemeClr val="lt1"/>
+          </a:fontRef>
+        </p:style>
+        <p:txBody>
+          <a:bodyPr rtlCol="0" anchor="ctr"/>
+          <a:lstStyle/>
+          <a:p>
+            <a:pPr algn="ctr"/>
+          </a:p>
+        </p:txBody>
+      </p:sp>
+      <p:sp>
+        <p:nvSpPr>
+          <p:cNvPr id="37" name="Rectangle 36"/>
+          <p:cNvSpPr/>
+          <p:nvPr/>
+        </p:nvSpPr>
+        <p:spPr>
+          <a:xfrm>
+            <a:off x="415290" y="1340289"/>
+            <a:ext cx="33020" cy="33020"/>
+          </a:xfrm>
+          <a:prstGeom prst="rect">
+            <a:avLst/>
+          </a:prstGeom>
+          <a:solidFill>
+            <a:srgbClr val="AD2B2B"/>
+          </a:solidFill>
+          <a:ln w="6350">
+            <a:solidFill>
+              <a:srgbClr val="FFFFFF"/>
+            </a:solidFill>
+          </a:ln>
+          <a:effectLst/>
+        </p:spPr>
+        <p:style>
+          <a:lnRef idx="1">
+            <a:schemeClr val="accent1"/>
+          </a:lnRef>
+          <a:fillRef idx="3">
+            <a:schemeClr val="accent1"/>
+          </a:fillRef>
+          <a:effectRef idx="2">
+            <a:schemeClr val="accent1"/>
+          </a:effectRef>
+          <a:fontRef idx="minor">
+            <a:schemeClr val="lt1"/>
+          </a:fontRef>
+        </p:style>
+        <p:txBody>
+          <a:bodyPr rtlCol="0" anchor="ctr"/>
+          <a:lstStyle/>
+          <a:p>
+            <a:pPr algn="ctr"/>
+          </a:p>
+        </p:txBody>
+      </p:sp>
+      <p:sp>
+        <p:nvSpPr>
+          <p:cNvPr id="38" name="Rectangle 37"/>
+          <p:cNvSpPr/>
+          <p:nvPr/>
+        </p:nvSpPr>
+        <p:spPr>
+          <a:xfrm>
+            <a:off x="999490" y="1038782"/>
+            <a:ext cx="33020" cy="33020"/>
+          </a:xfrm>
+          <a:prstGeom prst="rect">
+            <a:avLst/>
+          </a:prstGeom>
+          <a:solidFill>
+            <a:srgbClr val="AD2B2B"/>
+          </a:solidFill>
+          <a:ln w="6350">
+            <a:solidFill>
+              <a:srgbClr val="FFFFFF"/>
+            </a:solidFill>
+          </a:ln>
+          <a:effectLst/>
+        </p:spPr>
+        <p:style>
+          <a:lnRef idx="1">
+            <a:schemeClr val="accent1"/>
+          </a:lnRef>
+          <a:fillRef idx="3">
+            <a:schemeClr val="accent1"/>
+          </a:fillRef>
+          <a:effectRef idx="2">
+            <a:schemeClr val="accent1"/>
+          </a:effectRef>
+          <a:fontRef idx="minor">
+            <a:schemeClr val="lt1"/>
+          </a:fontRef>
+        </p:style>
+        <p:txBody>
+          <a:bodyPr rtlCol="0" anchor="ctr"/>
+          <a:lstStyle/>
+          <a:p>
+            <a:pPr algn="ctr"/>
+          </a:p>
+        </p:txBody>
+      </p:sp>
+      <p:sp>
+        <p:nvSpPr>
+          <p:cNvPr id="39" name="Rectangle 38"/>
+          <p:cNvSpPr/>
+          <p:nvPr/>
+        </p:nvSpPr>
+        <p:spPr>
+          <a:xfrm>
+            <a:off x="1583690" y="1024993"/>
+            <a:ext cx="33020" cy="33020"/>
+          </a:xfrm>
+          <a:prstGeom prst="rect">
+            <a:avLst/>
+          </a:prstGeom>
+          <a:solidFill>
+            <a:srgbClr val="AD2B2B"/>
+          </a:solidFill>
+          <a:ln w="6350">
+            <a:solidFill>
+              <a:srgbClr val="FFFFFF"/>
+            </a:solidFill>
+          </a:ln>
+          <a:effectLst/>
+        </p:spPr>
+        <p:style>
+          <a:lnRef idx="1">
+            <a:schemeClr val="accent1"/>
+          </a:lnRef>
+          <a:fillRef idx="3">
+            <a:schemeClr val="accent1"/>
+          </a:fillRef>
+          <a:effectRef idx="2">
+            <a:schemeClr val="accent1"/>
+          </a:effectRef>
+          <a:fontRef idx="minor">
+            <a:schemeClr val="lt1"/>
+          </a:fontRef>
+        </p:style>
+        <p:txBody>
+          <a:bodyPr rtlCol="0" anchor="ctr"/>
+          <a:lstStyle/>
+          <a:p>
+            <a:pPr algn="ctr"/>
+          </a:p>
+        </p:txBody>
+      </p:sp>
+      <p:sp>
+        <p:nvSpPr>
+          <p:cNvPr id="40" name="Freeform 39"/>
+          <p:cNvSpPr/>
+          <p:nvPr/>
+        </p:nvSpPr>
+        <p:spPr>
+          <a:xfrm>
+            <a:off x="431800" y="1393724"/>
+            <a:ext cx="1168400" cy="65520"/>
+          </a:xfrm>
+          <a:custGeom>
+            <a:avLst/>
+            <a:gdLst/>
+            <a:ahLst/>
+            <a:cxnLst/>
+            <a:rect l="l" t="t" r="r" b="b"/>
+            <a:pathLst>
+              <a:path w="1168400" h="65520">
+                <a:moveTo>
+                  <a:pt x="0" y="65520"/>
+                </a:moveTo>
+                <a:lnTo>
+                  <a:pt x="584200" y="24662"/>
+                </a:lnTo>
+                <a:lnTo>
+                  <a:pt x="1168400" y="0"/>
+                </a:lnTo>
+              </a:path>
+            </a:pathLst>
+          </a:custGeom>
+          <a:noFill/>
+          <a:ln w="10160">
+            <a:solidFill>
+              <a:srgbClr val="9EA5AD"/>
+            </a:solidFill>
+          </a:ln>
+          <a:effectLst/>
+        </p:spPr>
+        <p:style>
+          <a:lnRef idx="1">
+            <a:schemeClr val="accent1"/>
+          </a:lnRef>
+          <a:fillRef idx="3">
+            <a:schemeClr val="accent1"/>
+          </a:fillRef>
+          <a:effectRef idx="2">
+            <a:schemeClr val="accent1"/>
+          </a:effectRef>
+          <a:fontRef idx="minor">
+            <a:schemeClr val="lt1"/>
+          </a:fontRef>
+        </p:style>
+        <p:txBody>
+          <a:bodyPr rtlCol="0" anchor="ctr"/>
+          <a:lstStyle/>
+          <a:p>
+            <a:pPr algn="ctr"/>
+          </a:p>
+        </p:txBody>
+      </p:sp>
+      <p:sp>
+        <p:nvSpPr>
+          <p:cNvPr id="41" name="Rectangle 40"/>
+          <p:cNvSpPr/>
+          <p:nvPr/>
+        </p:nvSpPr>
+        <p:spPr>
+          <a:xfrm>
+            <a:off x="415290" y="1442734"/>
+            <a:ext cx="33020" cy="33020"/>
+          </a:xfrm>
+          <a:prstGeom prst="rect">
+            <a:avLst/>
+          </a:prstGeom>
+          <a:solidFill>
+            <a:srgbClr val="9EA5AD"/>
+          </a:solidFill>
+          <a:ln w="6350">
+            <a:solidFill>
+              <a:srgbClr val="FFFFFF"/>
+            </a:solidFill>
+          </a:ln>
+          <a:effectLst/>
+        </p:spPr>
+        <p:style>
+          <a:lnRef idx="1">
+            <a:schemeClr val="accent1"/>
+          </a:lnRef>
+          <a:fillRef idx="3">
+            <a:schemeClr val="accent1"/>
+          </a:fillRef>
+          <a:effectRef idx="2">
+            <a:schemeClr val="accent1"/>
+          </a:effectRef>
+          <a:fontRef idx="minor">
+            <a:schemeClr val="lt1"/>
+          </a:fontRef>
+        </p:style>
+        <p:txBody>
+          <a:bodyPr rtlCol="0" anchor="ctr"/>
+          <a:lstStyle/>
+          <a:p>
+            <a:pPr algn="ctr"/>
+          </a:p>
+        </p:txBody>
+      </p:sp>
+      <p:sp>
+        <p:nvSpPr>
+          <p:cNvPr id="42" name="Rectangle 41"/>
+          <p:cNvSpPr/>
+          <p:nvPr/>
+        </p:nvSpPr>
+        <p:spPr>
+          <a:xfrm>
+            <a:off x="999490" y="1401876"/>
+            <a:ext cx="33020" cy="33020"/>
+          </a:xfrm>
+          <a:prstGeom prst="rect">
+            <a:avLst/>
+          </a:prstGeom>
+          <a:solidFill>
+            <a:srgbClr val="9EA5AD"/>
+          </a:solidFill>
+          <a:ln w="6350">
+            <a:solidFill>
+              <a:srgbClr val="FFFFFF"/>
+            </a:solidFill>
+          </a:ln>
+          <a:effectLst/>
+        </p:spPr>
+        <p:style>
+          <a:lnRef idx="1">
+            <a:schemeClr val="accent1"/>
+          </a:lnRef>
+          <a:fillRef idx="3">
+            <a:schemeClr val="accent1"/>
+          </a:fillRef>
+          <a:effectRef idx="2">
+            <a:schemeClr val="accent1"/>
+          </a:effectRef>
+          <a:fontRef idx="minor">
+            <a:schemeClr val="lt1"/>
+          </a:fontRef>
+        </p:style>
+        <p:txBody>
+          <a:bodyPr rtlCol="0" anchor="ctr"/>
+          <a:lstStyle/>
+          <a:p>
+            <a:pPr algn="ctr"/>
+          </a:p>
+        </p:txBody>
+      </p:sp>
+      <p:sp>
+        <p:nvSpPr>
+          <p:cNvPr id="43" name="Rectangle 42"/>
+          <p:cNvSpPr/>
+          <p:nvPr/>
+        </p:nvSpPr>
+        <p:spPr>
+          <a:xfrm>
+            <a:off x="1583690" y="1377214"/>
+            <a:ext cx="33020" cy="33020"/>
+          </a:xfrm>
+          <a:prstGeom prst="rect">
+            <a:avLst/>
+          </a:prstGeom>
+          <a:solidFill>
+            <a:srgbClr val="9EA5AD"/>
+          </a:solidFill>
+          <a:ln w="6350">
+            <a:solidFill>
+              <a:srgbClr val="FFFFFF"/>
+            </a:solidFill>
+          </a:ln>
+          <a:effectLst/>
+        </p:spPr>
+        <p:style>
+          <a:lnRef idx="1">
+            <a:schemeClr val="accent1"/>
+          </a:lnRef>
+          <a:fillRef idx="3">
+            <a:schemeClr val="accent1"/>
+          </a:fillRef>
+          <a:effectRef idx="2">
+            <a:schemeClr val="accent1"/>
+          </a:effectRef>
+          <a:fontRef idx="minor">
+            <a:schemeClr val="lt1"/>
+          </a:fontRef>
+        </p:style>
+        <p:txBody>
+          <a:bodyPr rtlCol="0" anchor="ctr"/>
+          <a:lstStyle/>
+          <a:p>
+            <a:pPr algn="ctr"/>
+          </a:p>
+        </p:txBody>
+      </p:sp>
+      <p:sp>
+        <p:nvSpPr>
+          <p:cNvPr id="44" name="TextBox 43"/>
           <p:cNvSpPr txBox="1"/>
           <p:nvPr/>
         </p:nvSpPr>
@@ -3791,14 +4891,14 @@
       </p:sp>
       <p:cxnSp>
         <p:nvCxnSpPr>
-          <p:cNvPr id="22" name="Connector 21"/>
+          <p:cNvPr id="45" name="Connector 44"/>
           <p:cNvCxnSpPr/>
           <p:nvPr/>
         </p:nvCxnSpPr>
         <p:spPr>
           <a:xfrm>
-            <a:off x="2006600" y="1473200"/>
-            <a:ext cx="1219200" cy="0"/>
+            <a:off x="2057400" y="1524000"/>
+            <a:ext cx="1168400" cy="0"/>
           </a:xfrm>
           <a:prstGeom prst="line">
             <a:avLst/>
@@ -3826,14 +4926,14 @@
       </p:cxnSp>
       <p:cxnSp>
         <p:nvCxnSpPr>
-          <p:cNvPr id="23" name="Connector 22"/>
+          <p:cNvPr id="46" name="Connector 45"/>
           <p:cNvCxnSpPr/>
           <p:nvPr/>
         </p:nvCxnSpPr>
         <p:spPr>
           <a:xfrm>
-            <a:off x="2006600" y="381000"/>
-            <a:ext cx="0" cy="1092200"/>
+            <a:off x="2057400" y="457200"/>
+            <a:ext cx="0" cy="1066800"/>
           </a:xfrm>
           <a:prstGeom prst="line">
             <a:avLst/>
@@ -3861,13 +4961,13 @@
       </p:cxnSp>
       <p:cxnSp>
         <p:nvCxnSpPr>
-          <p:cNvPr id="24" name="Connector 23"/>
+          <p:cNvPr id="47" name="Connector 46"/>
           <p:cNvCxnSpPr/>
           <p:nvPr/>
         </p:nvCxnSpPr>
         <p:spPr>
           <a:xfrm>
-            <a:off x="2006600" y="1473200"/>
+            <a:off x="2057400" y="1524000"/>
             <a:ext cx="0" cy="31750"/>
           </a:xfrm>
           <a:prstGeom prst="line">
@@ -3896,13 +4996,13 @@
       </p:cxnSp>
       <p:sp>
         <p:nvSpPr>
-          <p:cNvPr id="25" name="TextBox 24"/>
+          <p:cNvPr id="48" name="TextBox 47"/>
           <p:cNvSpPr txBox="1"/>
           <p:nvPr/>
         </p:nvSpPr>
         <p:spPr>
           <a:xfrm>
-            <a:off x="482600" y="1494917"/>
+            <a:off x="533400" y="1545717"/>
             <a:ext cx="3048000" cy="164592"/>
           </a:xfrm>
           <a:prstGeom prst="rect">
@@ -3931,13 +5031,13 @@
       </p:sp>
       <p:cxnSp>
         <p:nvCxnSpPr>
-          <p:cNvPr id="26" name="Connector 25"/>
+          <p:cNvPr id="49" name="Connector 48"/>
           <p:cNvCxnSpPr/>
           <p:nvPr/>
         </p:nvCxnSpPr>
         <p:spPr>
           <a:xfrm>
-            <a:off x="2616200" y="1473200"/>
+            <a:off x="2641600" y="1524000"/>
             <a:ext cx="0" cy="31750"/>
           </a:xfrm>
           <a:prstGeom prst="line">
@@ -3966,13 +5066,13 @@
       </p:cxnSp>
       <p:sp>
         <p:nvSpPr>
-          <p:cNvPr id="27" name="TextBox 26"/>
+          <p:cNvPr id="50" name="TextBox 49"/>
           <p:cNvSpPr txBox="1"/>
           <p:nvPr/>
         </p:nvSpPr>
         <p:spPr>
           <a:xfrm>
-            <a:off x="1092200" y="1494917"/>
+            <a:off x="1117600" y="1545717"/>
             <a:ext cx="3048000" cy="164592"/>
           </a:xfrm>
           <a:prstGeom prst="rect">
@@ -4001,13 +5101,13 @@
       </p:sp>
       <p:cxnSp>
         <p:nvCxnSpPr>
-          <p:cNvPr id="28" name="Connector 27"/>
+          <p:cNvPr id="51" name="Connector 50"/>
           <p:cNvCxnSpPr/>
           <p:nvPr/>
         </p:nvCxnSpPr>
         <p:spPr>
           <a:xfrm>
-            <a:off x="3225800" y="1473200"/>
+            <a:off x="3225800" y="1524000"/>
             <a:ext cx="0" cy="31750"/>
           </a:xfrm>
           <a:prstGeom prst="line">
@@ -4036,13 +5136,13 @@
       </p:cxnSp>
       <p:sp>
         <p:nvSpPr>
-          <p:cNvPr id="29" name="TextBox 28"/>
+          <p:cNvPr id="52" name="TextBox 51"/>
           <p:cNvSpPr txBox="1"/>
           <p:nvPr/>
         </p:nvSpPr>
         <p:spPr>
           <a:xfrm>
-            <a:off x="1701800" y="1494917"/>
+            <a:off x="1701800" y="1545717"/>
             <a:ext cx="3048000" cy="164592"/>
           </a:xfrm>
           <a:prstGeom prst="rect">
@@ -4071,13 +5171,13 @@
       </p:sp>
       <p:cxnSp>
         <p:nvCxnSpPr>
-          <p:cNvPr id="30" name="Connector 29"/>
+          <p:cNvPr id="53" name="Connector 52"/>
           <p:cNvCxnSpPr/>
           <p:nvPr/>
         </p:nvCxnSpPr>
         <p:spPr>
           <a:xfrm>
-            <a:off x="1974850" y="1473200"/>
+            <a:off x="2025650" y="1484585"/>
             <a:ext cx="31750" cy="0"/>
           </a:xfrm>
           <a:prstGeom prst="line">
@@ -4106,13 +5206,13 @@
       </p:cxnSp>
       <p:sp>
         <p:nvSpPr>
-          <p:cNvPr id="31" name="TextBox 30"/>
+          <p:cNvPr id="54" name="TextBox 53"/>
           <p:cNvSpPr txBox="1"/>
           <p:nvPr/>
         </p:nvSpPr>
         <p:spPr>
           <a:xfrm>
-            <a:off x="436880" y="1404747"/>
+            <a:off x="487680" y="1416132"/>
             <a:ext cx="3048000" cy="164592"/>
           </a:xfrm>
           <a:prstGeom prst="rect">
@@ -4134,20 +5234,20 @@
                 </a:solidFill>
                 <a:latin typeface="Helvetica"/>
               </a:rPr>
-              <a:t>0</a:t>
+              <a:t>-20%</a:t>
             </a:r>
           </a:p>
         </p:txBody>
       </p:sp>
       <p:cxnSp>
         <p:nvCxnSpPr>
-          <p:cNvPr id="32" name="Connector 31"/>
+          <p:cNvPr id="55" name="Connector 54"/>
           <p:cNvCxnSpPr/>
           <p:nvPr/>
         </p:nvCxnSpPr>
         <p:spPr>
           <a:xfrm>
-            <a:off x="1974850" y="927100"/>
+            <a:off x="2025650" y="1268734"/>
             <a:ext cx="31750" cy="0"/>
           </a:xfrm>
           <a:prstGeom prst="line">
@@ -4176,13 +5276,13 @@
       </p:cxnSp>
       <p:sp>
         <p:nvSpPr>
-          <p:cNvPr id="33" name="TextBox 32"/>
+          <p:cNvPr id="56" name="TextBox 55"/>
           <p:cNvSpPr txBox="1"/>
           <p:nvPr/>
         </p:nvSpPr>
         <p:spPr>
           <a:xfrm>
-            <a:off x="436880" y="858647"/>
+            <a:off x="487680" y="1200281"/>
             <a:ext cx="3048000" cy="164592"/>
           </a:xfrm>
           <a:prstGeom prst="rect">
@@ -4204,20 +5304,20 @@
                 </a:solidFill>
                 <a:latin typeface="Helvetica"/>
               </a:rPr>
-              <a:t/>
+              <a:t>-10%</a:t>
             </a:r>
           </a:p>
         </p:txBody>
       </p:sp>
       <p:cxnSp>
         <p:nvCxnSpPr>
-          <p:cNvPr id="34" name="Connector 33"/>
+          <p:cNvPr id="57" name="Connector 56"/>
           <p:cNvCxnSpPr/>
           <p:nvPr/>
         </p:nvCxnSpPr>
         <p:spPr>
           <a:xfrm>
-            <a:off x="1974850" y="381000"/>
+            <a:off x="2025650" y="1052883"/>
             <a:ext cx="31750" cy="0"/>
           </a:xfrm>
           <a:prstGeom prst="line">
@@ -4246,13 +5346,13 @@
       </p:cxnSp>
       <p:sp>
         <p:nvSpPr>
-          <p:cNvPr id="35" name="TextBox 34"/>
+          <p:cNvPr id="58" name="TextBox 57"/>
           <p:cNvSpPr txBox="1"/>
           <p:nvPr/>
         </p:nvSpPr>
         <p:spPr>
           <a:xfrm>
-            <a:off x="436880" y="312547"/>
+            <a:off x="487680" y="984430"/>
             <a:ext cx="3048000" cy="164592"/>
           </a:xfrm>
           <a:prstGeom prst="rect">
@@ -4274,20 +5374,160 @@
                 </a:solidFill>
                 <a:latin typeface="Helvetica"/>
               </a:rPr>
-              <a:t>+</a:t>
-            </a:r>
-          </a:p>
-        </p:txBody>
-      </p:sp>
-      <p:sp>
-        <p:nvSpPr>
-          <p:cNvPr id="36" name="TextBox 35"/>
+              <a:t>+0%</a:t>
+            </a:r>
+          </a:p>
+        </p:txBody>
+      </p:sp>
+      <p:cxnSp>
+        <p:nvCxnSpPr>
+          <p:cNvPr id="59" name="Connector 58"/>
+          <p:cNvCxnSpPr/>
+          <p:nvPr/>
+        </p:nvCxnSpPr>
+        <p:spPr>
+          <a:xfrm>
+            <a:off x="2025650" y="837032"/>
+            <a:ext cx="31750" cy="0"/>
+          </a:xfrm>
+          <a:prstGeom prst="line">
+            <a:avLst/>
+          </a:prstGeom>
+          <a:ln w="7620">
+            <a:solidFill>
+              <a:srgbClr val="1C1E23"/>
+            </a:solidFill>
+          </a:ln>
+        </p:spPr>
+        <p:style>
+          <a:lnRef idx="2">
+            <a:schemeClr val="accent1"/>
+          </a:lnRef>
+          <a:fillRef idx="0">
+            <a:schemeClr val="accent1"/>
+          </a:fillRef>
+          <a:effectRef idx="1">
+            <a:schemeClr val="accent1"/>
+          </a:effectRef>
+          <a:fontRef idx="minor">
+            <a:schemeClr val="tx1"/>
+          </a:fontRef>
+        </p:style>
+      </p:cxnSp>
+      <p:sp>
+        <p:nvSpPr>
+          <p:cNvPr id="60" name="TextBox 59"/>
           <p:cNvSpPr txBox="1"/>
           <p:nvPr/>
         </p:nvSpPr>
         <p:spPr>
           <a:xfrm>
-            <a:off x="1092200" y="1592580"/>
+            <a:off x="487680" y="768579"/>
+            <a:ext cx="3048000" cy="164592"/>
+          </a:xfrm>
+          <a:prstGeom prst="rect">
+            <a:avLst/>
+          </a:prstGeom>
+          <a:noFill/>
+        </p:spPr>
+        <p:txBody>
+          <a:bodyPr wrap="none" lIns="0" rIns="0" tIns="0" bIns="0" anchor="ctr">
+            <a:spAutoFit/>
+          </a:bodyPr>
+          <a:lstStyle/>
+          <a:p>
+            <a:pPr algn="r"/>
+            <a:r>
+              <a:rPr sz="540" b="0" i="0">
+                <a:solidFill>
+                  <a:srgbClr val="6B727C"/>
+                </a:solidFill>
+                <a:latin typeface="Helvetica"/>
+              </a:rPr>
+              <a:t>+10%</a:t>
+            </a:r>
+          </a:p>
+        </p:txBody>
+      </p:sp>
+      <p:cxnSp>
+        <p:nvCxnSpPr>
+          <p:cNvPr id="61" name="Connector 60"/>
+          <p:cNvCxnSpPr/>
+          <p:nvPr/>
+        </p:nvCxnSpPr>
+        <p:spPr>
+          <a:xfrm>
+            <a:off x="2025650" y="621181"/>
+            <a:ext cx="31750" cy="0"/>
+          </a:xfrm>
+          <a:prstGeom prst="line">
+            <a:avLst/>
+          </a:prstGeom>
+          <a:ln w="7620">
+            <a:solidFill>
+              <a:srgbClr val="1C1E23"/>
+            </a:solidFill>
+          </a:ln>
+        </p:spPr>
+        <p:style>
+          <a:lnRef idx="2">
+            <a:schemeClr val="accent1"/>
+          </a:lnRef>
+          <a:fillRef idx="0">
+            <a:schemeClr val="accent1"/>
+          </a:fillRef>
+          <a:effectRef idx="1">
+            <a:schemeClr val="accent1"/>
+          </a:effectRef>
+          <a:fontRef idx="minor">
+            <a:schemeClr val="tx1"/>
+          </a:fontRef>
+        </p:style>
+      </p:cxnSp>
+      <p:sp>
+        <p:nvSpPr>
+          <p:cNvPr id="62" name="TextBox 61"/>
+          <p:cNvSpPr txBox="1"/>
+          <p:nvPr/>
+        </p:nvSpPr>
+        <p:spPr>
+          <a:xfrm>
+            <a:off x="487680" y="552728"/>
+            <a:ext cx="3048000" cy="164592"/>
+          </a:xfrm>
+          <a:prstGeom prst="rect">
+            <a:avLst/>
+          </a:prstGeom>
+          <a:noFill/>
+        </p:spPr>
+        <p:txBody>
+          <a:bodyPr wrap="none" lIns="0" rIns="0" tIns="0" bIns="0" anchor="ctr">
+            <a:spAutoFit/>
+          </a:bodyPr>
+          <a:lstStyle/>
+          <a:p>
+            <a:pPr algn="r"/>
+            <a:r>
+              <a:rPr sz="540" b="0" i="0">
+                <a:solidFill>
+                  <a:srgbClr val="6B727C"/>
+                </a:solidFill>
+                <a:latin typeface="Helvetica"/>
+              </a:rPr>
+              <a:t>+20%</a:t>
+            </a:r>
+          </a:p>
+        </p:txBody>
+      </p:sp>
+      <p:sp>
+        <p:nvSpPr>
+          <p:cNvPr id="63" name="TextBox 62"/>
+          <p:cNvSpPr txBox="1"/>
+          <p:nvPr/>
+        </p:nvSpPr>
+        <p:spPr>
+          <a:xfrm>
+            <a:off x="1117600" y="1643380"/>
             <a:ext cx="3048000" cy="182879"/>
           </a:xfrm>
           <a:prstGeom prst="rect">
@@ -4316,14 +5556,14 @@
       </p:sp>
       <p:cxnSp>
         <p:nvCxnSpPr>
-          <p:cNvPr id="37" name="Connector 36"/>
+          <p:cNvPr id="64" name="Connector 63"/>
           <p:cNvCxnSpPr/>
           <p:nvPr/>
         </p:nvCxnSpPr>
         <p:spPr>
           <a:xfrm>
-            <a:off x="2006600" y="839724"/>
-            <a:ext cx="1219200" cy="0"/>
+            <a:off x="2057400" y="1052883"/>
+            <a:ext cx="1168400" cy="0"/>
           </a:xfrm>
           <a:prstGeom prst="line">
             <a:avLst/>
@@ -4352,42 +5592,1002 @@
       </p:cxnSp>
       <p:sp>
         <p:nvSpPr>
-          <p:cNvPr id="38" name="TextBox 37"/>
-          <p:cNvSpPr txBox="1"/>
-          <p:nvPr/>
-        </p:nvSpPr>
-        <p:spPr>
-          <a:xfrm>
-            <a:off x="1092200" y="1059688"/>
-            <a:ext cx="3048000" cy="170688"/>
-          </a:xfrm>
-          <a:prstGeom prst="rect">
-            <a:avLst/>
-          </a:prstGeom>
+          <p:cNvPr id="65" name="Freeform 64"/>
+          <p:cNvSpPr/>
+          <p:nvPr/>
+        </p:nvSpPr>
+        <p:spPr>
+          <a:xfrm>
+            <a:off x="2057400" y="521955"/>
+            <a:ext cx="1168400" cy="343053"/>
+          </a:xfrm>
+          <a:custGeom>
+            <a:avLst/>
+            <a:gdLst/>
+            <a:ahLst/>
+            <a:cxnLst/>
+            <a:rect l="l" t="t" r="r" b="b"/>
+            <a:pathLst>
+              <a:path w="1168400" h="343053">
+                <a:moveTo>
+                  <a:pt x="0" y="343053"/>
+                </a:moveTo>
+                <a:lnTo>
+                  <a:pt x="584200" y="76037"/>
+                </a:lnTo>
+                <a:lnTo>
+                  <a:pt x="1168400" y="0"/>
+                </a:lnTo>
+              </a:path>
+            </a:pathLst>
+          </a:custGeom>
           <a:noFill/>
-        </p:spPr>
-        <p:txBody>
-          <a:bodyPr wrap="none" lIns="0" rIns="0" tIns="0" bIns="0" anchor="ctr">
-            <a:spAutoFit/>
-          </a:bodyPr>
+          <a:ln w="17780">
+            <a:solidFill>
+              <a:srgbClr val="215499"/>
+            </a:solidFill>
+          </a:ln>
+          <a:effectLst/>
+        </p:spPr>
+        <p:style>
+          <a:lnRef idx="1">
+            <a:schemeClr val="accent1"/>
+          </a:lnRef>
+          <a:fillRef idx="3">
+            <a:schemeClr val="accent1"/>
+          </a:fillRef>
+          <a:effectRef idx="2">
+            <a:schemeClr val="accent1"/>
+          </a:effectRef>
+          <a:fontRef idx="minor">
+            <a:schemeClr val="lt1"/>
+          </a:fontRef>
+        </p:style>
+        <p:txBody>
+          <a:bodyPr rtlCol="0" anchor="ctr"/>
           <a:lstStyle/>
           <a:p>
             <a:pPr algn="ctr"/>
-            <a:r>
-              <a:rPr sz="560" b="0" i="0">
-                <a:solidFill>
-                  <a:srgbClr val="AD2B2B"/>
-                </a:solidFill>
-                <a:latin typeface="Helvetica"/>
-              </a:rPr>
-              <a:t>[FIG-ROBUST-TIMESFM]</a:t>
-            </a:r>
-          </a:p>
-        </p:txBody>
-      </p:sp>
-      <p:sp>
-        <p:nvSpPr>
-          <p:cNvPr id="39" name="TextBox 38"/>
+          </a:p>
+        </p:txBody>
+      </p:sp>
+      <p:sp>
+        <p:nvSpPr>
+          <p:cNvPr id="66" name="Rectangle 65"/>
+          <p:cNvSpPr/>
+          <p:nvPr/>
+        </p:nvSpPr>
+        <p:spPr>
+          <a:xfrm>
+            <a:off x="2040889" y="848498"/>
+            <a:ext cx="33020" cy="33020"/>
+          </a:xfrm>
+          <a:prstGeom prst="rect">
+            <a:avLst/>
+          </a:prstGeom>
+          <a:solidFill>
+            <a:srgbClr val="215499"/>
+          </a:solidFill>
+          <a:ln w="6350">
+            <a:solidFill>
+              <a:srgbClr val="FFFFFF"/>
+            </a:solidFill>
+          </a:ln>
+          <a:effectLst/>
+        </p:spPr>
+        <p:style>
+          <a:lnRef idx="1">
+            <a:schemeClr val="accent1"/>
+          </a:lnRef>
+          <a:fillRef idx="3">
+            <a:schemeClr val="accent1"/>
+          </a:fillRef>
+          <a:effectRef idx="2">
+            <a:schemeClr val="accent1"/>
+          </a:effectRef>
+          <a:fontRef idx="minor">
+            <a:schemeClr val="lt1"/>
+          </a:fontRef>
+        </p:style>
+        <p:txBody>
+          <a:bodyPr rtlCol="0" anchor="ctr"/>
+          <a:lstStyle/>
+          <a:p>
+            <a:pPr algn="ctr"/>
+          </a:p>
+        </p:txBody>
+      </p:sp>
+      <p:sp>
+        <p:nvSpPr>
+          <p:cNvPr id="67" name="Rectangle 66"/>
+          <p:cNvSpPr/>
+          <p:nvPr/>
+        </p:nvSpPr>
+        <p:spPr>
+          <a:xfrm>
+            <a:off x="2625090" y="581482"/>
+            <a:ext cx="33020" cy="33020"/>
+          </a:xfrm>
+          <a:prstGeom prst="rect">
+            <a:avLst/>
+          </a:prstGeom>
+          <a:solidFill>
+            <a:srgbClr val="215499"/>
+          </a:solidFill>
+          <a:ln w="6350">
+            <a:solidFill>
+              <a:srgbClr val="FFFFFF"/>
+            </a:solidFill>
+          </a:ln>
+          <a:effectLst/>
+        </p:spPr>
+        <p:style>
+          <a:lnRef idx="1">
+            <a:schemeClr val="accent1"/>
+          </a:lnRef>
+          <a:fillRef idx="3">
+            <a:schemeClr val="accent1"/>
+          </a:fillRef>
+          <a:effectRef idx="2">
+            <a:schemeClr val="accent1"/>
+          </a:effectRef>
+          <a:fontRef idx="minor">
+            <a:schemeClr val="lt1"/>
+          </a:fontRef>
+        </p:style>
+        <p:txBody>
+          <a:bodyPr rtlCol="0" anchor="ctr"/>
+          <a:lstStyle/>
+          <a:p>
+            <a:pPr algn="ctr"/>
+          </a:p>
+        </p:txBody>
+      </p:sp>
+      <p:sp>
+        <p:nvSpPr>
+          <p:cNvPr id="68" name="Rectangle 67"/>
+          <p:cNvSpPr/>
+          <p:nvPr/>
+        </p:nvSpPr>
+        <p:spPr>
+          <a:xfrm>
+            <a:off x="3209290" y="505445"/>
+            <a:ext cx="33020" cy="33020"/>
+          </a:xfrm>
+          <a:prstGeom prst="rect">
+            <a:avLst/>
+          </a:prstGeom>
+          <a:solidFill>
+            <a:srgbClr val="215499"/>
+          </a:solidFill>
+          <a:ln w="6350">
+            <a:solidFill>
+              <a:srgbClr val="FFFFFF"/>
+            </a:solidFill>
+          </a:ln>
+          <a:effectLst/>
+        </p:spPr>
+        <p:style>
+          <a:lnRef idx="1">
+            <a:schemeClr val="accent1"/>
+          </a:lnRef>
+          <a:fillRef idx="3">
+            <a:schemeClr val="accent1"/>
+          </a:fillRef>
+          <a:effectRef idx="2">
+            <a:schemeClr val="accent1"/>
+          </a:effectRef>
+          <a:fontRef idx="minor">
+            <a:schemeClr val="lt1"/>
+          </a:fontRef>
+        </p:style>
+        <p:txBody>
+          <a:bodyPr rtlCol="0" anchor="ctr"/>
+          <a:lstStyle/>
+          <a:p>
+            <a:pPr algn="ctr"/>
+          </a:p>
+        </p:txBody>
+      </p:sp>
+      <p:sp>
+        <p:nvSpPr>
+          <p:cNvPr id="69" name="Freeform 68"/>
+          <p:cNvSpPr/>
+          <p:nvPr/>
+        </p:nvSpPr>
+        <p:spPr>
+          <a:xfrm>
+            <a:off x="2057400" y="655456"/>
+            <a:ext cx="1168400" cy="261349"/>
+          </a:xfrm>
+          <a:custGeom>
+            <a:avLst/>
+            <a:gdLst/>
+            <a:ahLst/>
+            <a:cxnLst/>
+            <a:rect l="l" t="t" r="r" b="b"/>
+            <a:pathLst>
+              <a:path w="1168400" h="261349">
+                <a:moveTo>
+                  <a:pt x="0" y="261349"/>
+                </a:moveTo>
+                <a:lnTo>
+                  <a:pt x="584200" y="0"/>
+                </a:lnTo>
+                <a:lnTo>
+                  <a:pt x="1168400" y="20369"/>
+                </a:lnTo>
+              </a:path>
+            </a:pathLst>
+          </a:custGeom>
+          <a:noFill/>
+          <a:ln w="10160">
+            <a:solidFill>
+              <a:srgbClr val="AD6B0A"/>
+            </a:solidFill>
+          </a:ln>
+          <a:effectLst/>
+        </p:spPr>
+        <p:style>
+          <a:lnRef idx="1">
+            <a:schemeClr val="accent1"/>
+          </a:lnRef>
+          <a:fillRef idx="3">
+            <a:schemeClr val="accent1"/>
+          </a:fillRef>
+          <a:effectRef idx="2">
+            <a:schemeClr val="accent1"/>
+          </a:effectRef>
+          <a:fontRef idx="minor">
+            <a:schemeClr val="lt1"/>
+          </a:fontRef>
+        </p:style>
+        <p:txBody>
+          <a:bodyPr rtlCol="0" anchor="ctr"/>
+          <a:lstStyle/>
+          <a:p>
+            <a:pPr algn="ctr"/>
+          </a:p>
+        </p:txBody>
+      </p:sp>
+      <p:sp>
+        <p:nvSpPr>
+          <p:cNvPr id="70" name="Rectangle 69"/>
+          <p:cNvSpPr/>
+          <p:nvPr/>
+        </p:nvSpPr>
+        <p:spPr>
+          <a:xfrm>
+            <a:off x="2040889" y="900295"/>
+            <a:ext cx="33020" cy="33020"/>
+          </a:xfrm>
+          <a:prstGeom prst="rect">
+            <a:avLst/>
+          </a:prstGeom>
+          <a:solidFill>
+            <a:srgbClr val="AD6B0A"/>
+          </a:solidFill>
+          <a:ln w="6350">
+            <a:solidFill>
+              <a:srgbClr val="FFFFFF"/>
+            </a:solidFill>
+          </a:ln>
+          <a:effectLst/>
+        </p:spPr>
+        <p:style>
+          <a:lnRef idx="1">
+            <a:schemeClr val="accent1"/>
+          </a:lnRef>
+          <a:fillRef idx="3">
+            <a:schemeClr val="accent1"/>
+          </a:fillRef>
+          <a:effectRef idx="2">
+            <a:schemeClr val="accent1"/>
+          </a:effectRef>
+          <a:fontRef idx="minor">
+            <a:schemeClr val="lt1"/>
+          </a:fontRef>
+        </p:style>
+        <p:txBody>
+          <a:bodyPr rtlCol="0" anchor="ctr"/>
+          <a:lstStyle/>
+          <a:p>
+            <a:pPr algn="ctr"/>
+          </a:p>
+        </p:txBody>
+      </p:sp>
+      <p:sp>
+        <p:nvSpPr>
+          <p:cNvPr id="71" name="Rectangle 70"/>
+          <p:cNvSpPr/>
+          <p:nvPr/>
+        </p:nvSpPr>
+        <p:spPr>
+          <a:xfrm>
+            <a:off x="2625090" y="638946"/>
+            <a:ext cx="33020" cy="33020"/>
+          </a:xfrm>
+          <a:prstGeom prst="rect">
+            <a:avLst/>
+          </a:prstGeom>
+          <a:solidFill>
+            <a:srgbClr val="AD6B0A"/>
+          </a:solidFill>
+          <a:ln w="6350">
+            <a:solidFill>
+              <a:srgbClr val="FFFFFF"/>
+            </a:solidFill>
+          </a:ln>
+          <a:effectLst/>
+        </p:spPr>
+        <p:style>
+          <a:lnRef idx="1">
+            <a:schemeClr val="accent1"/>
+          </a:lnRef>
+          <a:fillRef idx="3">
+            <a:schemeClr val="accent1"/>
+          </a:fillRef>
+          <a:effectRef idx="2">
+            <a:schemeClr val="accent1"/>
+          </a:effectRef>
+          <a:fontRef idx="minor">
+            <a:schemeClr val="lt1"/>
+          </a:fontRef>
+        </p:style>
+        <p:txBody>
+          <a:bodyPr rtlCol="0" anchor="ctr"/>
+          <a:lstStyle/>
+          <a:p>
+            <a:pPr algn="ctr"/>
+          </a:p>
+        </p:txBody>
+      </p:sp>
+      <p:sp>
+        <p:nvSpPr>
+          <p:cNvPr id="72" name="Rectangle 71"/>
+          <p:cNvSpPr/>
+          <p:nvPr/>
+        </p:nvSpPr>
+        <p:spPr>
+          <a:xfrm>
+            <a:off x="3209290" y="659315"/>
+            <a:ext cx="33020" cy="33020"/>
+          </a:xfrm>
+          <a:prstGeom prst="rect">
+            <a:avLst/>
+          </a:prstGeom>
+          <a:solidFill>
+            <a:srgbClr val="AD6B0A"/>
+          </a:solidFill>
+          <a:ln w="6350">
+            <a:solidFill>
+              <a:srgbClr val="FFFFFF"/>
+            </a:solidFill>
+          </a:ln>
+          <a:effectLst/>
+        </p:spPr>
+        <p:style>
+          <a:lnRef idx="1">
+            <a:schemeClr val="accent1"/>
+          </a:lnRef>
+          <a:fillRef idx="3">
+            <a:schemeClr val="accent1"/>
+          </a:fillRef>
+          <a:effectRef idx="2">
+            <a:schemeClr val="accent1"/>
+          </a:effectRef>
+          <a:fontRef idx="minor">
+            <a:schemeClr val="lt1"/>
+          </a:fontRef>
+        </p:style>
+        <p:txBody>
+          <a:bodyPr rtlCol="0" anchor="ctr"/>
+          <a:lstStyle/>
+          <a:p>
+            <a:pPr algn="ctr"/>
+          </a:p>
+        </p:txBody>
+      </p:sp>
+      <p:sp>
+        <p:nvSpPr>
+          <p:cNvPr id="73" name="Freeform 72"/>
+          <p:cNvSpPr/>
+          <p:nvPr/>
+        </p:nvSpPr>
+        <p:spPr>
+          <a:xfrm>
+            <a:off x="2057400" y="757861"/>
+            <a:ext cx="1168400" cy="136226"/>
+          </a:xfrm>
+          <a:custGeom>
+            <a:avLst/>
+            <a:gdLst/>
+            <a:ahLst/>
+            <a:cxnLst/>
+            <a:rect l="l" t="t" r="r" b="b"/>
+            <a:pathLst>
+              <a:path w="1168400" h="136226">
+                <a:moveTo>
+                  <a:pt x="0" y="136226"/>
+                </a:moveTo>
+                <a:lnTo>
+                  <a:pt x="584200" y="0"/>
+                </a:lnTo>
+                <a:lnTo>
+                  <a:pt x="1168400" y="127848"/>
+                </a:lnTo>
+              </a:path>
+            </a:pathLst>
+          </a:custGeom>
+          <a:noFill/>
+          <a:ln w="10160">
+            <a:solidFill>
+              <a:srgbClr val="19704F"/>
+            </a:solidFill>
+          </a:ln>
+          <a:effectLst/>
+        </p:spPr>
+        <p:style>
+          <a:lnRef idx="1">
+            <a:schemeClr val="accent1"/>
+          </a:lnRef>
+          <a:fillRef idx="3">
+            <a:schemeClr val="accent1"/>
+          </a:fillRef>
+          <a:effectRef idx="2">
+            <a:schemeClr val="accent1"/>
+          </a:effectRef>
+          <a:fontRef idx="minor">
+            <a:schemeClr val="lt1"/>
+          </a:fontRef>
+        </p:style>
+        <p:txBody>
+          <a:bodyPr rtlCol="0" anchor="ctr"/>
+          <a:lstStyle/>
+          <a:p>
+            <a:pPr algn="ctr"/>
+          </a:p>
+        </p:txBody>
+      </p:sp>
+      <p:sp>
+        <p:nvSpPr>
+          <p:cNvPr id="74" name="Rectangle 73"/>
+          <p:cNvSpPr/>
+          <p:nvPr/>
+        </p:nvSpPr>
+        <p:spPr>
+          <a:xfrm>
+            <a:off x="2040889" y="877577"/>
+            <a:ext cx="33020" cy="33020"/>
+          </a:xfrm>
+          <a:prstGeom prst="rect">
+            <a:avLst/>
+          </a:prstGeom>
+          <a:solidFill>
+            <a:srgbClr val="19704F"/>
+          </a:solidFill>
+          <a:ln w="6350">
+            <a:solidFill>
+              <a:srgbClr val="FFFFFF"/>
+            </a:solidFill>
+          </a:ln>
+          <a:effectLst/>
+        </p:spPr>
+        <p:style>
+          <a:lnRef idx="1">
+            <a:schemeClr val="accent1"/>
+          </a:lnRef>
+          <a:fillRef idx="3">
+            <a:schemeClr val="accent1"/>
+          </a:fillRef>
+          <a:effectRef idx="2">
+            <a:schemeClr val="accent1"/>
+          </a:effectRef>
+          <a:fontRef idx="minor">
+            <a:schemeClr val="lt1"/>
+          </a:fontRef>
+        </p:style>
+        <p:txBody>
+          <a:bodyPr rtlCol="0" anchor="ctr"/>
+          <a:lstStyle/>
+          <a:p>
+            <a:pPr algn="ctr"/>
+          </a:p>
+        </p:txBody>
+      </p:sp>
+      <p:sp>
+        <p:nvSpPr>
+          <p:cNvPr id="75" name="Rectangle 74"/>
+          <p:cNvSpPr/>
+          <p:nvPr/>
+        </p:nvSpPr>
+        <p:spPr>
+          <a:xfrm>
+            <a:off x="2625090" y="741351"/>
+            <a:ext cx="33020" cy="33020"/>
+          </a:xfrm>
+          <a:prstGeom prst="rect">
+            <a:avLst/>
+          </a:prstGeom>
+          <a:solidFill>
+            <a:srgbClr val="19704F"/>
+          </a:solidFill>
+          <a:ln w="6350">
+            <a:solidFill>
+              <a:srgbClr val="FFFFFF"/>
+            </a:solidFill>
+          </a:ln>
+          <a:effectLst/>
+        </p:spPr>
+        <p:style>
+          <a:lnRef idx="1">
+            <a:schemeClr val="accent1"/>
+          </a:lnRef>
+          <a:fillRef idx="3">
+            <a:schemeClr val="accent1"/>
+          </a:fillRef>
+          <a:effectRef idx="2">
+            <a:schemeClr val="accent1"/>
+          </a:effectRef>
+          <a:fontRef idx="minor">
+            <a:schemeClr val="lt1"/>
+          </a:fontRef>
+        </p:style>
+        <p:txBody>
+          <a:bodyPr rtlCol="0" anchor="ctr"/>
+          <a:lstStyle/>
+          <a:p>
+            <a:pPr algn="ctr"/>
+          </a:p>
+        </p:txBody>
+      </p:sp>
+      <p:sp>
+        <p:nvSpPr>
+          <p:cNvPr id="76" name="Rectangle 75"/>
+          <p:cNvSpPr/>
+          <p:nvPr/>
+        </p:nvSpPr>
+        <p:spPr>
+          <a:xfrm>
+            <a:off x="3209290" y="869199"/>
+            <a:ext cx="33020" cy="33020"/>
+          </a:xfrm>
+          <a:prstGeom prst="rect">
+            <a:avLst/>
+          </a:prstGeom>
+          <a:solidFill>
+            <a:srgbClr val="19704F"/>
+          </a:solidFill>
+          <a:ln w="6350">
+            <a:solidFill>
+              <a:srgbClr val="FFFFFF"/>
+            </a:solidFill>
+          </a:ln>
+          <a:effectLst/>
+        </p:spPr>
+        <p:style>
+          <a:lnRef idx="1">
+            <a:schemeClr val="accent1"/>
+          </a:lnRef>
+          <a:fillRef idx="3">
+            <a:schemeClr val="accent1"/>
+          </a:fillRef>
+          <a:effectRef idx="2">
+            <a:schemeClr val="accent1"/>
+          </a:effectRef>
+          <a:fontRef idx="minor">
+            <a:schemeClr val="lt1"/>
+          </a:fontRef>
+        </p:style>
+        <p:txBody>
+          <a:bodyPr rtlCol="0" anchor="ctr"/>
+          <a:lstStyle/>
+          <a:p>
+            <a:pPr algn="ctr"/>
+          </a:p>
+        </p:txBody>
+      </p:sp>
+      <p:sp>
+        <p:nvSpPr>
+          <p:cNvPr id="77" name="Freeform 76"/>
+          <p:cNvSpPr/>
+          <p:nvPr/>
+        </p:nvSpPr>
+        <p:spPr>
+          <a:xfrm>
+            <a:off x="2057400" y="864717"/>
+            <a:ext cx="1168400" cy="260975"/>
+          </a:xfrm>
+          <a:custGeom>
+            <a:avLst/>
+            <a:gdLst/>
+            <a:ahLst/>
+            <a:cxnLst/>
+            <a:rect l="l" t="t" r="r" b="b"/>
+            <a:pathLst>
+              <a:path w="1168400" h="260975">
+                <a:moveTo>
+                  <a:pt x="0" y="260975"/>
+                </a:moveTo>
+                <a:lnTo>
+                  <a:pt x="584200" y="195964"/>
+                </a:lnTo>
+                <a:lnTo>
+                  <a:pt x="1168400" y="0"/>
+                </a:lnTo>
+              </a:path>
+            </a:pathLst>
+          </a:custGeom>
+          <a:noFill/>
+          <a:ln w="10160">
+            <a:solidFill>
+              <a:srgbClr val="AD2B2B"/>
+            </a:solidFill>
+          </a:ln>
+          <a:effectLst/>
+        </p:spPr>
+        <p:style>
+          <a:lnRef idx="1">
+            <a:schemeClr val="accent1"/>
+          </a:lnRef>
+          <a:fillRef idx="3">
+            <a:schemeClr val="accent1"/>
+          </a:fillRef>
+          <a:effectRef idx="2">
+            <a:schemeClr val="accent1"/>
+          </a:effectRef>
+          <a:fontRef idx="minor">
+            <a:schemeClr val="lt1"/>
+          </a:fontRef>
+        </p:style>
+        <p:txBody>
+          <a:bodyPr rtlCol="0" anchor="ctr"/>
+          <a:lstStyle/>
+          <a:p>
+            <a:pPr algn="ctr"/>
+          </a:p>
+        </p:txBody>
+      </p:sp>
+      <p:sp>
+        <p:nvSpPr>
+          <p:cNvPr id="78" name="Rectangle 77"/>
+          <p:cNvSpPr/>
+          <p:nvPr/>
+        </p:nvSpPr>
+        <p:spPr>
+          <a:xfrm>
+            <a:off x="2040889" y="1109182"/>
+            <a:ext cx="33020" cy="33020"/>
+          </a:xfrm>
+          <a:prstGeom prst="rect">
+            <a:avLst/>
+          </a:prstGeom>
+          <a:solidFill>
+            <a:srgbClr val="AD2B2B"/>
+          </a:solidFill>
+          <a:ln w="6350">
+            <a:solidFill>
+              <a:srgbClr val="FFFFFF"/>
+            </a:solidFill>
+          </a:ln>
+          <a:effectLst/>
+        </p:spPr>
+        <p:style>
+          <a:lnRef idx="1">
+            <a:schemeClr val="accent1"/>
+          </a:lnRef>
+          <a:fillRef idx="3">
+            <a:schemeClr val="accent1"/>
+          </a:fillRef>
+          <a:effectRef idx="2">
+            <a:schemeClr val="accent1"/>
+          </a:effectRef>
+          <a:fontRef idx="minor">
+            <a:schemeClr val="lt1"/>
+          </a:fontRef>
+        </p:style>
+        <p:txBody>
+          <a:bodyPr rtlCol="0" anchor="ctr"/>
+          <a:lstStyle/>
+          <a:p>
+            <a:pPr algn="ctr"/>
+          </a:p>
+        </p:txBody>
+      </p:sp>
+      <p:sp>
+        <p:nvSpPr>
+          <p:cNvPr id="79" name="Rectangle 78"/>
+          <p:cNvSpPr/>
+          <p:nvPr/>
+        </p:nvSpPr>
+        <p:spPr>
+          <a:xfrm>
+            <a:off x="2625090" y="1044171"/>
+            <a:ext cx="33020" cy="33020"/>
+          </a:xfrm>
+          <a:prstGeom prst="rect">
+            <a:avLst/>
+          </a:prstGeom>
+          <a:solidFill>
+            <a:srgbClr val="AD2B2B"/>
+          </a:solidFill>
+          <a:ln w="6350">
+            <a:solidFill>
+              <a:srgbClr val="FFFFFF"/>
+            </a:solidFill>
+          </a:ln>
+          <a:effectLst/>
+        </p:spPr>
+        <p:style>
+          <a:lnRef idx="1">
+            <a:schemeClr val="accent1"/>
+          </a:lnRef>
+          <a:fillRef idx="3">
+            <a:schemeClr val="accent1"/>
+          </a:fillRef>
+          <a:effectRef idx="2">
+            <a:schemeClr val="accent1"/>
+          </a:effectRef>
+          <a:fontRef idx="minor">
+            <a:schemeClr val="lt1"/>
+          </a:fontRef>
+        </p:style>
+        <p:txBody>
+          <a:bodyPr rtlCol="0" anchor="ctr"/>
+          <a:lstStyle/>
+          <a:p>
+            <a:pPr algn="ctr"/>
+          </a:p>
+        </p:txBody>
+      </p:sp>
+      <p:sp>
+        <p:nvSpPr>
+          <p:cNvPr id="80" name="Rectangle 79"/>
+          <p:cNvSpPr/>
+          <p:nvPr/>
+        </p:nvSpPr>
+        <p:spPr>
+          <a:xfrm>
+            <a:off x="3209290" y="848207"/>
+            <a:ext cx="33020" cy="33020"/>
+          </a:xfrm>
+          <a:prstGeom prst="rect">
+            <a:avLst/>
+          </a:prstGeom>
+          <a:solidFill>
+            <a:srgbClr val="AD2B2B"/>
+          </a:solidFill>
+          <a:ln w="6350">
+            <a:solidFill>
+              <a:srgbClr val="FFFFFF"/>
+            </a:solidFill>
+          </a:ln>
+          <a:effectLst/>
+        </p:spPr>
+        <p:style>
+          <a:lnRef idx="1">
+            <a:schemeClr val="accent1"/>
+          </a:lnRef>
+          <a:fillRef idx="3">
+            <a:schemeClr val="accent1"/>
+          </a:fillRef>
+          <a:effectRef idx="2">
+            <a:schemeClr val="accent1"/>
+          </a:effectRef>
+          <a:fontRef idx="minor">
+            <a:schemeClr val="lt1"/>
+          </a:fontRef>
+        </p:style>
+        <p:txBody>
+          <a:bodyPr rtlCol="0" anchor="ctr"/>
+          <a:lstStyle/>
+          <a:p>
+            <a:pPr algn="ctr"/>
+          </a:p>
+        </p:txBody>
+      </p:sp>
+      <p:sp>
+        <p:nvSpPr>
+          <p:cNvPr id="81" name="Freeform 80"/>
+          <p:cNvSpPr/>
+          <p:nvPr/>
+        </p:nvSpPr>
+        <p:spPr>
+          <a:xfrm>
+            <a:off x="2057400" y="974472"/>
+            <a:ext cx="1168400" cy="77614"/>
+          </a:xfrm>
+          <a:custGeom>
+            <a:avLst/>
+            <a:gdLst/>
+            <a:ahLst/>
+            <a:cxnLst/>
+            <a:rect l="l" t="t" r="r" b="b"/>
+            <a:pathLst>
+              <a:path w="1168400" h="77614">
+                <a:moveTo>
+                  <a:pt x="0" y="0"/>
+                </a:moveTo>
+                <a:lnTo>
+                  <a:pt x="584200" y="50107"/>
+                </a:lnTo>
+                <a:lnTo>
+                  <a:pt x="1168400" y="77614"/>
+                </a:lnTo>
+              </a:path>
+            </a:pathLst>
+          </a:custGeom>
+          <a:noFill/>
+          <a:ln w="10160">
+            <a:solidFill>
+              <a:srgbClr val="9EA5AD"/>
+            </a:solidFill>
+          </a:ln>
+          <a:effectLst/>
+        </p:spPr>
+        <p:style>
+          <a:lnRef idx="1">
+            <a:schemeClr val="accent1"/>
+          </a:lnRef>
+          <a:fillRef idx="3">
+            <a:schemeClr val="accent1"/>
+          </a:fillRef>
+          <a:effectRef idx="2">
+            <a:schemeClr val="accent1"/>
+          </a:effectRef>
+          <a:fontRef idx="minor">
+            <a:schemeClr val="lt1"/>
+          </a:fontRef>
+        </p:style>
+        <p:txBody>
+          <a:bodyPr rtlCol="0" anchor="ctr"/>
+          <a:lstStyle/>
+          <a:p>
+            <a:pPr algn="ctr"/>
+          </a:p>
+        </p:txBody>
+      </p:sp>
+      <p:sp>
+        <p:nvSpPr>
+          <p:cNvPr id="82" name="Rectangle 81"/>
+          <p:cNvSpPr/>
+          <p:nvPr/>
+        </p:nvSpPr>
+        <p:spPr>
+          <a:xfrm>
+            <a:off x="2040889" y="957962"/>
+            <a:ext cx="33020" cy="33020"/>
+          </a:xfrm>
+          <a:prstGeom prst="rect">
+            <a:avLst/>
+          </a:prstGeom>
+          <a:solidFill>
+            <a:srgbClr val="9EA5AD"/>
+          </a:solidFill>
+          <a:ln w="6350">
+            <a:solidFill>
+              <a:srgbClr val="FFFFFF"/>
+            </a:solidFill>
+          </a:ln>
+          <a:effectLst/>
+        </p:spPr>
+        <p:style>
+          <a:lnRef idx="1">
+            <a:schemeClr val="accent1"/>
+          </a:lnRef>
+          <a:fillRef idx="3">
+            <a:schemeClr val="accent1"/>
+          </a:fillRef>
+          <a:effectRef idx="2">
+            <a:schemeClr val="accent1"/>
+          </a:effectRef>
+          <a:fontRef idx="minor">
+            <a:schemeClr val="lt1"/>
+          </a:fontRef>
+        </p:style>
+        <p:txBody>
+          <a:bodyPr rtlCol="0" anchor="ctr"/>
+          <a:lstStyle/>
+          <a:p>
+            <a:pPr algn="ctr"/>
+          </a:p>
+        </p:txBody>
+      </p:sp>
+      <p:sp>
+        <p:nvSpPr>
+          <p:cNvPr id="83" name="Rectangle 82"/>
+          <p:cNvSpPr/>
+          <p:nvPr/>
+        </p:nvSpPr>
+        <p:spPr>
+          <a:xfrm>
+            <a:off x="2625090" y="1008069"/>
+            <a:ext cx="33020" cy="33020"/>
+          </a:xfrm>
+          <a:prstGeom prst="rect">
+            <a:avLst/>
+          </a:prstGeom>
+          <a:solidFill>
+            <a:srgbClr val="9EA5AD"/>
+          </a:solidFill>
+          <a:ln w="6350">
+            <a:solidFill>
+              <a:srgbClr val="FFFFFF"/>
+            </a:solidFill>
+          </a:ln>
+          <a:effectLst/>
+        </p:spPr>
+        <p:style>
+          <a:lnRef idx="1">
+            <a:schemeClr val="accent1"/>
+          </a:lnRef>
+          <a:fillRef idx="3">
+            <a:schemeClr val="accent1"/>
+          </a:fillRef>
+          <a:effectRef idx="2">
+            <a:schemeClr val="accent1"/>
+          </a:effectRef>
+          <a:fontRef idx="minor">
+            <a:schemeClr val="lt1"/>
+          </a:fontRef>
+        </p:style>
+        <p:txBody>
+          <a:bodyPr rtlCol="0" anchor="ctr"/>
+          <a:lstStyle/>
+          <a:p>
+            <a:pPr algn="ctr"/>
+          </a:p>
+        </p:txBody>
+      </p:sp>
+      <p:sp>
+        <p:nvSpPr>
+          <p:cNvPr id="84" name="Rectangle 83"/>
+          <p:cNvSpPr/>
+          <p:nvPr/>
+        </p:nvSpPr>
+        <p:spPr>
+          <a:xfrm>
+            <a:off x="3209290" y="1035576"/>
+            <a:ext cx="33020" cy="33020"/>
+          </a:xfrm>
+          <a:prstGeom prst="rect">
+            <a:avLst/>
+          </a:prstGeom>
+          <a:solidFill>
+            <a:srgbClr val="9EA5AD"/>
+          </a:solidFill>
+          <a:ln w="6350">
+            <a:solidFill>
+              <a:srgbClr val="FFFFFF"/>
+            </a:solidFill>
+          </a:ln>
+          <a:effectLst/>
+        </p:spPr>
+        <p:style>
+          <a:lnRef idx="1">
+            <a:schemeClr val="accent1"/>
+          </a:lnRef>
+          <a:fillRef idx="3">
+            <a:schemeClr val="accent1"/>
+          </a:fillRef>
+          <a:effectRef idx="2">
+            <a:schemeClr val="accent1"/>
+          </a:effectRef>
+          <a:fontRef idx="minor">
+            <a:schemeClr val="lt1"/>
+          </a:fontRef>
+        </p:style>
+        <p:txBody>
+          <a:bodyPr rtlCol="0" anchor="ctr"/>
+          <a:lstStyle/>
+          <a:p>
+            <a:pPr algn="ctr"/>
+          </a:p>
+        </p:txBody>
+      </p:sp>
+      <p:sp>
+        <p:nvSpPr>
+          <p:cNvPr id="85" name="TextBox 84"/>
           <p:cNvSpPr txBox="1"/>
           <p:nvPr/>
         </p:nvSpPr>
@@ -4422,14 +6622,14 @@
       </p:sp>
       <p:cxnSp>
         <p:nvCxnSpPr>
-          <p:cNvPr id="40" name="Connector 39"/>
+          <p:cNvPr id="86" name="Connector 85"/>
           <p:cNvCxnSpPr/>
           <p:nvPr/>
         </p:nvCxnSpPr>
         <p:spPr>
           <a:xfrm>
-            <a:off x="3632200" y="1473200"/>
-            <a:ext cx="1219200" cy="0"/>
+            <a:off x="3683000" y="1524000"/>
+            <a:ext cx="1168400" cy="0"/>
           </a:xfrm>
           <a:prstGeom prst="line">
             <a:avLst/>
@@ -4457,14 +6657,14 @@
       </p:cxnSp>
       <p:cxnSp>
         <p:nvCxnSpPr>
-          <p:cNvPr id="41" name="Connector 40"/>
+          <p:cNvPr id="87" name="Connector 86"/>
           <p:cNvCxnSpPr/>
           <p:nvPr/>
         </p:nvCxnSpPr>
         <p:spPr>
           <a:xfrm>
-            <a:off x="3632200" y="381000"/>
-            <a:ext cx="0" cy="1092200"/>
+            <a:off x="3683000" y="457200"/>
+            <a:ext cx="0" cy="1066800"/>
           </a:xfrm>
           <a:prstGeom prst="line">
             <a:avLst/>
@@ -4492,13 +6692,13 @@
       </p:cxnSp>
       <p:cxnSp>
         <p:nvCxnSpPr>
-          <p:cNvPr id="42" name="Connector 41"/>
+          <p:cNvPr id="88" name="Connector 87"/>
           <p:cNvCxnSpPr/>
           <p:nvPr/>
         </p:nvCxnSpPr>
         <p:spPr>
           <a:xfrm>
-            <a:off x="3632200" y="1473200"/>
+            <a:off x="3683000" y="1524000"/>
             <a:ext cx="0" cy="31750"/>
           </a:xfrm>
           <a:prstGeom prst="line">
@@ -4527,13 +6727,13 @@
       </p:cxnSp>
       <p:sp>
         <p:nvSpPr>
-          <p:cNvPr id="43" name="TextBox 42"/>
+          <p:cNvPr id="89" name="TextBox 88"/>
           <p:cNvSpPr txBox="1"/>
           <p:nvPr/>
         </p:nvSpPr>
         <p:spPr>
           <a:xfrm>
-            <a:off x="2108200" y="1494917"/>
+            <a:off x="2159000" y="1545717"/>
             <a:ext cx="3048000" cy="164592"/>
           </a:xfrm>
           <a:prstGeom prst="rect">
@@ -4562,13 +6762,13 @@
       </p:sp>
       <p:cxnSp>
         <p:nvCxnSpPr>
-          <p:cNvPr id="44" name="Connector 43"/>
+          <p:cNvPr id="90" name="Connector 89"/>
           <p:cNvCxnSpPr/>
           <p:nvPr/>
         </p:nvCxnSpPr>
         <p:spPr>
           <a:xfrm>
-            <a:off x="4241800" y="1473200"/>
+            <a:off x="4267200" y="1524000"/>
             <a:ext cx="0" cy="31750"/>
           </a:xfrm>
           <a:prstGeom prst="line">
@@ -4597,13 +6797,13 @@
       </p:cxnSp>
       <p:sp>
         <p:nvSpPr>
-          <p:cNvPr id="45" name="TextBox 44"/>
+          <p:cNvPr id="91" name="TextBox 90"/>
           <p:cNvSpPr txBox="1"/>
           <p:nvPr/>
         </p:nvSpPr>
         <p:spPr>
           <a:xfrm>
-            <a:off x="2717800" y="1494917"/>
+            <a:off x="2743200" y="1545717"/>
             <a:ext cx="3048000" cy="164592"/>
           </a:xfrm>
           <a:prstGeom prst="rect">
@@ -4632,13 +6832,13 @@
       </p:sp>
       <p:cxnSp>
         <p:nvCxnSpPr>
-          <p:cNvPr id="46" name="Connector 45"/>
+          <p:cNvPr id="92" name="Connector 91"/>
           <p:cNvCxnSpPr/>
           <p:nvPr/>
         </p:nvCxnSpPr>
         <p:spPr>
           <a:xfrm>
-            <a:off x="4851400" y="1473200"/>
+            <a:off x="4851400" y="1524000"/>
             <a:ext cx="0" cy="31750"/>
           </a:xfrm>
           <a:prstGeom prst="line">
@@ -4667,13 +6867,13 @@
       </p:cxnSp>
       <p:sp>
         <p:nvSpPr>
-          <p:cNvPr id="47" name="TextBox 46"/>
+          <p:cNvPr id="93" name="TextBox 92"/>
           <p:cNvSpPr txBox="1"/>
           <p:nvPr/>
         </p:nvSpPr>
         <p:spPr>
           <a:xfrm>
-            <a:off x="3327400" y="1494917"/>
+            <a:off x="3327400" y="1545717"/>
             <a:ext cx="3048000" cy="164592"/>
           </a:xfrm>
           <a:prstGeom prst="rect">
@@ -4702,13 +6902,13 @@
       </p:sp>
       <p:cxnSp>
         <p:nvCxnSpPr>
-          <p:cNvPr id="48" name="Connector 47"/>
+          <p:cNvPr id="94" name="Connector 93"/>
           <p:cNvCxnSpPr/>
           <p:nvPr/>
         </p:nvCxnSpPr>
         <p:spPr>
           <a:xfrm>
-            <a:off x="3600450" y="1473200"/>
+            <a:off x="3651250" y="1484585"/>
             <a:ext cx="31750" cy="0"/>
           </a:xfrm>
           <a:prstGeom prst="line">
@@ -4737,13 +6937,13 @@
       </p:cxnSp>
       <p:sp>
         <p:nvSpPr>
-          <p:cNvPr id="49" name="TextBox 48"/>
+          <p:cNvPr id="95" name="TextBox 94"/>
           <p:cNvSpPr txBox="1"/>
           <p:nvPr/>
         </p:nvSpPr>
         <p:spPr>
           <a:xfrm>
-            <a:off x="2062479" y="1404747"/>
+            <a:off x="2113279" y="1416132"/>
             <a:ext cx="3048000" cy="164592"/>
           </a:xfrm>
           <a:prstGeom prst="rect">
@@ -4765,20 +6965,20 @@
                 </a:solidFill>
                 <a:latin typeface="Helvetica"/>
               </a:rPr>
-              <a:t>0</a:t>
+              <a:t>-20%</a:t>
             </a:r>
           </a:p>
         </p:txBody>
       </p:sp>
       <p:cxnSp>
         <p:nvCxnSpPr>
-          <p:cNvPr id="50" name="Connector 49"/>
+          <p:cNvPr id="96" name="Connector 95"/>
           <p:cNvCxnSpPr/>
           <p:nvPr/>
         </p:nvCxnSpPr>
         <p:spPr>
           <a:xfrm>
-            <a:off x="3600450" y="927100"/>
+            <a:off x="3651250" y="1268734"/>
             <a:ext cx="31750" cy="0"/>
           </a:xfrm>
           <a:prstGeom prst="line">
@@ -4807,13 +7007,13 @@
       </p:cxnSp>
       <p:sp>
         <p:nvSpPr>
-          <p:cNvPr id="51" name="TextBox 50"/>
+          <p:cNvPr id="97" name="TextBox 96"/>
           <p:cNvSpPr txBox="1"/>
           <p:nvPr/>
         </p:nvSpPr>
         <p:spPr>
           <a:xfrm>
-            <a:off x="2062479" y="858647"/>
+            <a:off x="2113279" y="1200281"/>
             <a:ext cx="3048000" cy="164592"/>
           </a:xfrm>
           <a:prstGeom prst="rect">
@@ -4835,20 +7035,20 @@
                 </a:solidFill>
                 <a:latin typeface="Helvetica"/>
               </a:rPr>
-              <a:t/>
+              <a:t>-10%</a:t>
             </a:r>
           </a:p>
         </p:txBody>
       </p:sp>
       <p:cxnSp>
         <p:nvCxnSpPr>
-          <p:cNvPr id="52" name="Connector 51"/>
+          <p:cNvPr id="98" name="Connector 97"/>
           <p:cNvCxnSpPr/>
           <p:nvPr/>
         </p:nvCxnSpPr>
         <p:spPr>
           <a:xfrm>
-            <a:off x="3600450" y="381000"/>
+            <a:off x="3651250" y="1052883"/>
             <a:ext cx="31750" cy="0"/>
           </a:xfrm>
           <a:prstGeom prst="line">
@@ -4877,13 +7077,13 @@
       </p:cxnSp>
       <p:sp>
         <p:nvSpPr>
-          <p:cNvPr id="53" name="TextBox 52"/>
+          <p:cNvPr id="99" name="TextBox 98"/>
           <p:cNvSpPr txBox="1"/>
           <p:nvPr/>
         </p:nvSpPr>
         <p:spPr>
           <a:xfrm>
-            <a:off x="2062479" y="312547"/>
+            <a:off x="2113279" y="984430"/>
             <a:ext cx="3048000" cy="164592"/>
           </a:xfrm>
           <a:prstGeom prst="rect">
@@ -4905,20 +7105,160 @@
                 </a:solidFill>
                 <a:latin typeface="Helvetica"/>
               </a:rPr>
-              <a:t>+</a:t>
-            </a:r>
-          </a:p>
-        </p:txBody>
-      </p:sp>
-      <p:sp>
-        <p:nvSpPr>
-          <p:cNvPr id="54" name="TextBox 53"/>
+              <a:t>+0%</a:t>
+            </a:r>
+          </a:p>
+        </p:txBody>
+      </p:sp>
+      <p:cxnSp>
+        <p:nvCxnSpPr>
+          <p:cNvPr id="100" name="Connector 99"/>
+          <p:cNvCxnSpPr/>
+          <p:nvPr/>
+        </p:nvCxnSpPr>
+        <p:spPr>
+          <a:xfrm>
+            <a:off x="3651250" y="837032"/>
+            <a:ext cx="31750" cy="0"/>
+          </a:xfrm>
+          <a:prstGeom prst="line">
+            <a:avLst/>
+          </a:prstGeom>
+          <a:ln w="7620">
+            <a:solidFill>
+              <a:srgbClr val="1C1E23"/>
+            </a:solidFill>
+          </a:ln>
+        </p:spPr>
+        <p:style>
+          <a:lnRef idx="2">
+            <a:schemeClr val="accent1"/>
+          </a:lnRef>
+          <a:fillRef idx="0">
+            <a:schemeClr val="accent1"/>
+          </a:fillRef>
+          <a:effectRef idx="1">
+            <a:schemeClr val="accent1"/>
+          </a:effectRef>
+          <a:fontRef idx="minor">
+            <a:schemeClr val="tx1"/>
+          </a:fontRef>
+        </p:style>
+      </p:cxnSp>
+      <p:sp>
+        <p:nvSpPr>
+          <p:cNvPr id="101" name="TextBox 100"/>
           <p:cNvSpPr txBox="1"/>
           <p:nvPr/>
         </p:nvSpPr>
         <p:spPr>
           <a:xfrm>
-            <a:off x="2717800" y="1592580"/>
+            <a:off x="2113279" y="768579"/>
+            <a:ext cx="3048000" cy="164592"/>
+          </a:xfrm>
+          <a:prstGeom prst="rect">
+            <a:avLst/>
+          </a:prstGeom>
+          <a:noFill/>
+        </p:spPr>
+        <p:txBody>
+          <a:bodyPr wrap="none" lIns="0" rIns="0" tIns="0" bIns="0" anchor="ctr">
+            <a:spAutoFit/>
+          </a:bodyPr>
+          <a:lstStyle/>
+          <a:p>
+            <a:pPr algn="r"/>
+            <a:r>
+              <a:rPr sz="540" b="0" i="0">
+                <a:solidFill>
+                  <a:srgbClr val="6B727C"/>
+                </a:solidFill>
+                <a:latin typeface="Helvetica"/>
+              </a:rPr>
+              <a:t>+10%</a:t>
+            </a:r>
+          </a:p>
+        </p:txBody>
+      </p:sp>
+      <p:cxnSp>
+        <p:nvCxnSpPr>
+          <p:cNvPr id="102" name="Connector 101"/>
+          <p:cNvCxnSpPr/>
+          <p:nvPr/>
+        </p:nvCxnSpPr>
+        <p:spPr>
+          <a:xfrm>
+            <a:off x="3651250" y="621181"/>
+            <a:ext cx="31750" cy="0"/>
+          </a:xfrm>
+          <a:prstGeom prst="line">
+            <a:avLst/>
+          </a:prstGeom>
+          <a:ln w="7620">
+            <a:solidFill>
+              <a:srgbClr val="1C1E23"/>
+            </a:solidFill>
+          </a:ln>
+        </p:spPr>
+        <p:style>
+          <a:lnRef idx="2">
+            <a:schemeClr val="accent1"/>
+          </a:lnRef>
+          <a:fillRef idx="0">
+            <a:schemeClr val="accent1"/>
+          </a:fillRef>
+          <a:effectRef idx="1">
+            <a:schemeClr val="accent1"/>
+          </a:effectRef>
+          <a:fontRef idx="minor">
+            <a:schemeClr val="tx1"/>
+          </a:fontRef>
+        </p:style>
+      </p:cxnSp>
+      <p:sp>
+        <p:nvSpPr>
+          <p:cNvPr id="103" name="TextBox 102"/>
+          <p:cNvSpPr txBox="1"/>
+          <p:nvPr/>
+        </p:nvSpPr>
+        <p:spPr>
+          <a:xfrm>
+            <a:off x="2113279" y="552728"/>
+            <a:ext cx="3048000" cy="164592"/>
+          </a:xfrm>
+          <a:prstGeom prst="rect">
+            <a:avLst/>
+          </a:prstGeom>
+          <a:noFill/>
+        </p:spPr>
+        <p:txBody>
+          <a:bodyPr wrap="none" lIns="0" rIns="0" tIns="0" bIns="0" anchor="ctr">
+            <a:spAutoFit/>
+          </a:bodyPr>
+          <a:lstStyle/>
+          <a:p>
+            <a:pPr algn="r"/>
+            <a:r>
+              <a:rPr sz="540" b="0" i="0">
+                <a:solidFill>
+                  <a:srgbClr val="6B727C"/>
+                </a:solidFill>
+                <a:latin typeface="Helvetica"/>
+              </a:rPr>
+              <a:t>+20%</a:t>
+            </a:r>
+          </a:p>
+        </p:txBody>
+      </p:sp>
+      <p:sp>
+        <p:nvSpPr>
+          <p:cNvPr id="104" name="TextBox 103"/>
+          <p:cNvSpPr txBox="1"/>
+          <p:nvPr/>
+        </p:nvSpPr>
+        <p:spPr>
+          <a:xfrm>
+            <a:off x="2743200" y="1643380"/>
             <a:ext cx="3048000" cy="182879"/>
           </a:xfrm>
           <a:prstGeom prst="rect">
@@ -4947,14 +7287,14 @@
       </p:sp>
       <p:cxnSp>
         <p:nvCxnSpPr>
-          <p:cNvPr id="55" name="Connector 54"/>
+          <p:cNvPr id="105" name="Connector 104"/>
           <p:cNvCxnSpPr/>
           <p:nvPr/>
         </p:nvCxnSpPr>
         <p:spPr>
           <a:xfrm>
-            <a:off x="3632200" y="839724"/>
-            <a:ext cx="1219200" cy="0"/>
+            <a:off x="3683000" y="1052883"/>
+            <a:ext cx="1168400" cy="0"/>
           </a:xfrm>
           <a:prstGeom prst="line">
             <a:avLst/>
@@ -4983,14 +7323,1053 @@
       </p:cxnSp>
       <p:sp>
         <p:nvSpPr>
-          <p:cNvPr id="56" name="TextBox 55"/>
+          <p:cNvPr id="106" name="Freeform 105"/>
+          <p:cNvSpPr/>
+          <p:nvPr/>
+        </p:nvSpPr>
+        <p:spPr>
+          <a:xfrm>
+            <a:off x="3683000" y="596354"/>
+            <a:ext cx="1168400" cy="340857"/>
+          </a:xfrm>
+          <a:custGeom>
+            <a:avLst/>
+            <a:gdLst/>
+            <a:ahLst/>
+            <a:cxnLst/>
+            <a:rect l="l" t="t" r="r" b="b"/>
+            <a:pathLst>
+              <a:path w="1168400" h="340857">
+                <a:moveTo>
+                  <a:pt x="0" y="166897"/>
+                </a:moveTo>
+                <a:lnTo>
+                  <a:pt x="584200" y="0"/>
+                </a:lnTo>
+                <a:lnTo>
+                  <a:pt x="1168400" y="340857"/>
+                </a:lnTo>
+              </a:path>
+            </a:pathLst>
+          </a:custGeom>
+          <a:noFill/>
+          <a:ln w="17780">
+            <a:solidFill>
+              <a:srgbClr val="215499"/>
+            </a:solidFill>
+          </a:ln>
+          <a:effectLst/>
+        </p:spPr>
+        <p:style>
+          <a:lnRef idx="1">
+            <a:schemeClr val="accent1"/>
+          </a:lnRef>
+          <a:fillRef idx="3">
+            <a:schemeClr val="accent1"/>
+          </a:fillRef>
+          <a:effectRef idx="2">
+            <a:schemeClr val="accent1"/>
+          </a:effectRef>
+          <a:fontRef idx="minor">
+            <a:schemeClr val="lt1"/>
+          </a:fontRef>
+        </p:style>
+        <p:txBody>
+          <a:bodyPr rtlCol="0" anchor="ctr"/>
+          <a:lstStyle/>
+          <a:p>
+            <a:pPr algn="ctr"/>
+          </a:p>
+        </p:txBody>
+      </p:sp>
+      <p:sp>
+        <p:nvSpPr>
+          <p:cNvPr id="107" name="Rectangle 106"/>
+          <p:cNvSpPr/>
+          <p:nvPr/>
+        </p:nvSpPr>
+        <p:spPr>
+          <a:xfrm>
+            <a:off x="3666490" y="746741"/>
+            <a:ext cx="33020" cy="33020"/>
+          </a:xfrm>
+          <a:prstGeom prst="rect">
+            <a:avLst/>
+          </a:prstGeom>
+          <a:solidFill>
+            <a:srgbClr val="215499"/>
+          </a:solidFill>
+          <a:ln w="6350">
+            <a:solidFill>
+              <a:srgbClr val="FFFFFF"/>
+            </a:solidFill>
+          </a:ln>
+          <a:effectLst/>
+        </p:spPr>
+        <p:style>
+          <a:lnRef idx="1">
+            <a:schemeClr val="accent1"/>
+          </a:lnRef>
+          <a:fillRef idx="3">
+            <a:schemeClr val="accent1"/>
+          </a:fillRef>
+          <a:effectRef idx="2">
+            <a:schemeClr val="accent1"/>
+          </a:effectRef>
+          <a:fontRef idx="minor">
+            <a:schemeClr val="lt1"/>
+          </a:fontRef>
+        </p:style>
+        <p:txBody>
+          <a:bodyPr rtlCol="0" anchor="ctr"/>
+          <a:lstStyle/>
+          <a:p>
+            <a:pPr algn="ctr"/>
+          </a:p>
+        </p:txBody>
+      </p:sp>
+      <p:sp>
+        <p:nvSpPr>
+          <p:cNvPr id="108" name="Rectangle 107"/>
+          <p:cNvSpPr/>
+          <p:nvPr/>
+        </p:nvSpPr>
+        <p:spPr>
+          <a:xfrm>
+            <a:off x="4250690" y="579844"/>
+            <a:ext cx="33020" cy="33020"/>
+          </a:xfrm>
+          <a:prstGeom prst="rect">
+            <a:avLst/>
+          </a:prstGeom>
+          <a:solidFill>
+            <a:srgbClr val="215499"/>
+          </a:solidFill>
+          <a:ln w="6350">
+            <a:solidFill>
+              <a:srgbClr val="FFFFFF"/>
+            </a:solidFill>
+          </a:ln>
+          <a:effectLst/>
+        </p:spPr>
+        <p:style>
+          <a:lnRef idx="1">
+            <a:schemeClr val="accent1"/>
+          </a:lnRef>
+          <a:fillRef idx="3">
+            <a:schemeClr val="accent1"/>
+          </a:fillRef>
+          <a:effectRef idx="2">
+            <a:schemeClr val="accent1"/>
+          </a:effectRef>
+          <a:fontRef idx="minor">
+            <a:schemeClr val="lt1"/>
+          </a:fontRef>
+        </p:style>
+        <p:txBody>
+          <a:bodyPr rtlCol="0" anchor="ctr"/>
+          <a:lstStyle/>
+          <a:p>
+            <a:pPr algn="ctr"/>
+          </a:p>
+        </p:txBody>
+      </p:sp>
+      <p:sp>
+        <p:nvSpPr>
+          <p:cNvPr id="109" name="Rectangle 108"/>
+          <p:cNvSpPr/>
+          <p:nvPr/>
+        </p:nvSpPr>
+        <p:spPr>
+          <a:xfrm>
+            <a:off x="4834890" y="920701"/>
+            <a:ext cx="33020" cy="33020"/>
+          </a:xfrm>
+          <a:prstGeom prst="rect">
+            <a:avLst/>
+          </a:prstGeom>
+          <a:solidFill>
+            <a:srgbClr val="215499"/>
+          </a:solidFill>
+          <a:ln w="6350">
+            <a:solidFill>
+              <a:srgbClr val="FFFFFF"/>
+            </a:solidFill>
+          </a:ln>
+          <a:effectLst/>
+        </p:spPr>
+        <p:style>
+          <a:lnRef idx="1">
+            <a:schemeClr val="accent1"/>
+          </a:lnRef>
+          <a:fillRef idx="3">
+            <a:schemeClr val="accent1"/>
+          </a:fillRef>
+          <a:effectRef idx="2">
+            <a:schemeClr val="accent1"/>
+          </a:effectRef>
+          <a:fontRef idx="minor">
+            <a:schemeClr val="lt1"/>
+          </a:fontRef>
+        </p:style>
+        <p:txBody>
+          <a:bodyPr rtlCol="0" anchor="ctr"/>
+          <a:lstStyle/>
+          <a:p>
+            <a:pPr algn="ctr"/>
+          </a:p>
+        </p:txBody>
+      </p:sp>
+      <p:sp>
+        <p:nvSpPr>
+          <p:cNvPr id="110" name="Freeform 109"/>
+          <p:cNvSpPr/>
+          <p:nvPr/>
+        </p:nvSpPr>
+        <p:spPr>
+          <a:xfrm>
+            <a:off x="3683000" y="554710"/>
+            <a:ext cx="1168400" cy="188161"/>
+          </a:xfrm>
+          <a:custGeom>
+            <a:avLst/>
+            <a:gdLst/>
+            <a:ahLst/>
+            <a:cxnLst/>
+            <a:rect l="l" t="t" r="r" b="b"/>
+            <a:pathLst>
+              <a:path w="1168400" h="188161">
+                <a:moveTo>
+                  <a:pt x="0" y="188161"/>
+                </a:moveTo>
+                <a:lnTo>
+                  <a:pt x="584200" y="0"/>
+                </a:lnTo>
+                <a:lnTo>
+                  <a:pt x="1168400" y="23711"/>
+                </a:lnTo>
+              </a:path>
+            </a:pathLst>
+          </a:custGeom>
+          <a:noFill/>
+          <a:ln w="10160">
+            <a:solidFill>
+              <a:srgbClr val="AD6B0A"/>
+            </a:solidFill>
+          </a:ln>
+          <a:effectLst/>
+        </p:spPr>
+        <p:style>
+          <a:lnRef idx="1">
+            <a:schemeClr val="accent1"/>
+          </a:lnRef>
+          <a:fillRef idx="3">
+            <a:schemeClr val="accent1"/>
+          </a:fillRef>
+          <a:effectRef idx="2">
+            <a:schemeClr val="accent1"/>
+          </a:effectRef>
+          <a:fontRef idx="minor">
+            <a:schemeClr val="lt1"/>
+          </a:fontRef>
+        </p:style>
+        <p:txBody>
+          <a:bodyPr rtlCol="0" anchor="ctr"/>
+          <a:lstStyle/>
+          <a:p>
+            <a:pPr algn="ctr"/>
+          </a:p>
+        </p:txBody>
+      </p:sp>
+      <p:sp>
+        <p:nvSpPr>
+          <p:cNvPr id="111" name="Rectangle 110"/>
+          <p:cNvSpPr/>
+          <p:nvPr/>
+        </p:nvSpPr>
+        <p:spPr>
+          <a:xfrm>
+            <a:off x="3666490" y="726361"/>
+            <a:ext cx="33020" cy="33020"/>
+          </a:xfrm>
+          <a:prstGeom prst="rect">
+            <a:avLst/>
+          </a:prstGeom>
+          <a:solidFill>
+            <a:srgbClr val="AD6B0A"/>
+          </a:solidFill>
+          <a:ln w="6350">
+            <a:solidFill>
+              <a:srgbClr val="FFFFFF"/>
+            </a:solidFill>
+          </a:ln>
+          <a:effectLst/>
+        </p:spPr>
+        <p:style>
+          <a:lnRef idx="1">
+            <a:schemeClr val="accent1"/>
+          </a:lnRef>
+          <a:fillRef idx="3">
+            <a:schemeClr val="accent1"/>
+          </a:fillRef>
+          <a:effectRef idx="2">
+            <a:schemeClr val="accent1"/>
+          </a:effectRef>
+          <a:fontRef idx="minor">
+            <a:schemeClr val="lt1"/>
+          </a:fontRef>
+        </p:style>
+        <p:txBody>
+          <a:bodyPr rtlCol="0" anchor="ctr"/>
+          <a:lstStyle/>
+          <a:p>
+            <a:pPr algn="ctr"/>
+          </a:p>
+        </p:txBody>
+      </p:sp>
+      <p:sp>
+        <p:nvSpPr>
+          <p:cNvPr id="112" name="Rectangle 111"/>
+          <p:cNvSpPr/>
+          <p:nvPr/>
+        </p:nvSpPr>
+        <p:spPr>
+          <a:xfrm>
+            <a:off x="4250690" y="538200"/>
+            <a:ext cx="33020" cy="33020"/>
+          </a:xfrm>
+          <a:prstGeom prst="rect">
+            <a:avLst/>
+          </a:prstGeom>
+          <a:solidFill>
+            <a:srgbClr val="AD6B0A"/>
+          </a:solidFill>
+          <a:ln w="6350">
+            <a:solidFill>
+              <a:srgbClr val="FFFFFF"/>
+            </a:solidFill>
+          </a:ln>
+          <a:effectLst/>
+        </p:spPr>
+        <p:style>
+          <a:lnRef idx="1">
+            <a:schemeClr val="accent1"/>
+          </a:lnRef>
+          <a:fillRef idx="3">
+            <a:schemeClr val="accent1"/>
+          </a:fillRef>
+          <a:effectRef idx="2">
+            <a:schemeClr val="accent1"/>
+          </a:effectRef>
+          <a:fontRef idx="minor">
+            <a:schemeClr val="lt1"/>
+          </a:fontRef>
+        </p:style>
+        <p:txBody>
+          <a:bodyPr rtlCol="0" anchor="ctr"/>
+          <a:lstStyle/>
+          <a:p>
+            <a:pPr algn="ctr"/>
+          </a:p>
+        </p:txBody>
+      </p:sp>
+      <p:sp>
+        <p:nvSpPr>
+          <p:cNvPr id="113" name="Rectangle 112"/>
+          <p:cNvSpPr/>
+          <p:nvPr/>
+        </p:nvSpPr>
+        <p:spPr>
+          <a:xfrm>
+            <a:off x="4834890" y="561911"/>
+            <a:ext cx="33020" cy="33020"/>
+          </a:xfrm>
+          <a:prstGeom prst="rect">
+            <a:avLst/>
+          </a:prstGeom>
+          <a:solidFill>
+            <a:srgbClr val="AD6B0A"/>
+          </a:solidFill>
+          <a:ln w="6350">
+            <a:solidFill>
+              <a:srgbClr val="FFFFFF"/>
+            </a:solidFill>
+          </a:ln>
+          <a:effectLst/>
+        </p:spPr>
+        <p:style>
+          <a:lnRef idx="1">
+            <a:schemeClr val="accent1"/>
+          </a:lnRef>
+          <a:fillRef idx="3">
+            <a:schemeClr val="accent1"/>
+          </a:fillRef>
+          <a:effectRef idx="2">
+            <a:schemeClr val="accent1"/>
+          </a:effectRef>
+          <a:fontRef idx="minor">
+            <a:schemeClr val="lt1"/>
+          </a:fontRef>
+        </p:style>
+        <p:txBody>
+          <a:bodyPr rtlCol="0" anchor="ctr"/>
+          <a:lstStyle/>
+          <a:p>
+            <a:pPr algn="ctr"/>
+          </a:p>
+        </p:txBody>
+      </p:sp>
+      <p:sp>
+        <p:nvSpPr>
+          <p:cNvPr id="114" name="Freeform 113"/>
+          <p:cNvSpPr/>
+          <p:nvPr/>
+        </p:nvSpPr>
+        <p:spPr>
+          <a:xfrm>
+            <a:off x="3683000" y="549923"/>
+            <a:ext cx="1168400" cy="410133"/>
+          </a:xfrm>
+          <a:custGeom>
+            <a:avLst/>
+            <a:gdLst/>
+            <a:ahLst/>
+            <a:cxnLst/>
+            <a:rect l="l" t="t" r="r" b="b"/>
+            <a:pathLst>
+              <a:path w="1168400" h="410133">
+                <a:moveTo>
+                  <a:pt x="0" y="305413"/>
+                </a:moveTo>
+                <a:lnTo>
+                  <a:pt x="584200" y="0"/>
+                </a:lnTo>
+                <a:lnTo>
+                  <a:pt x="1168400" y="410133"/>
+                </a:lnTo>
+              </a:path>
+            </a:pathLst>
+          </a:custGeom>
+          <a:noFill/>
+          <a:ln w="10160">
+            <a:solidFill>
+              <a:srgbClr val="19704F"/>
+            </a:solidFill>
+          </a:ln>
+          <a:effectLst/>
+        </p:spPr>
+        <p:style>
+          <a:lnRef idx="1">
+            <a:schemeClr val="accent1"/>
+          </a:lnRef>
+          <a:fillRef idx="3">
+            <a:schemeClr val="accent1"/>
+          </a:fillRef>
+          <a:effectRef idx="2">
+            <a:schemeClr val="accent1"/>
+          </a:effectRef>
+          <a:fontRef idx="minor">
+            <a:schemeClr val="lt1"/>
+          </a:fontRef>
+        </p:style>
+        <p:txBody>
+          <a:bodyPr rtlCol="0" anchor="ctr"/>
+          <a:lstStyle/>
+          <a:p>
+            <a:pPr algn="ctr"/>
+          </a:p>
+        </p:txBody>
+      </p:sp>
+      <p:sp>
+        <p:nvSpPr>
+          <p:cNvPr id="115" name="Rectangle 114"/>
+          <p:cNvSpPr/>
+          <p:nvPr/>
+        </p:nvSpPr>
+        <p:spPr>
+          <a:xfrm>
+            <a:off x="3666490" y="838826"/>
+            <a:ext cx="33020" cy="33020"/>
+          </a:xfrm>
+          <a:prstGeom prst="rect">
+            <a:avLst/>
+          </a:prstGeom>
+          <a:solidFill>
+            <a:srgbClr val="19704F"/>
+          </a:solidFill>
+          <a:ln w="6350">
+            <a:solidFill>
+              <a:srgbClr val="FFFFFF"/>
+            </a:solidFill>
+          </a:ln>
+          <a:effectLst/>
+        </p:spPr>
+        <p:style>
+          <a:lnRef idx="1">
+            <a:schemeClr val="accent1"/>
+          </a:lnRef>
+          <a:fillRef idx="3">
+            <a:schemeClr val="accent1"/>
+          </a:fillRef>
+          <a:effectRef idx="2">
+            <a:schemeClr val="accent1"/>
+          </a:effectRef>
+          <a:fontRef idx="minor">
+            <a:schemeClr val="lt1"/>
+          </a:fontRef>
+        </p:style>
+        <p:txBody>
+          <a:bodyPr rtlCol="0" anchor="ctr"/>
+          <a:lstStyle/>
+          <a:p>
+            <a:pPr algn="ctr"/>
+          </a:p>
+        </p:txBody>
+      </p:sp>
+      <p:sp>
+        <p:nvSpPr>
+          <p:cNvPr id="116" name="Rectangle 115"/>
+          <p:cNvSpPr/>
+          <p:nvPr/>
+        </p:nvSpPr>
+        <p:spPr>
+          <a:xfrm>
+            <a:off x="4250690" y="533413"/>
+            <a:ext cx="33020" cy="33020"/>
+          </a:xfrm>
+          <a:prstGeom prst="rect">
+            <a:avLst/>
+          </a:prstGeom>
+          <a:solidFill>
+            <a:srgbClr val="19704F"/>
+          </a:solidFill>
+          <a:ln w="6350">
+            <a:solidFill>
+              <a:srgbClr val="FFFFFF"/>
+            </a:solidFill>
+          </a:ln>
+          <a:effectLst/>
+        </p:spPr>
+        <p:style>
+          <a:lnRef idx="1">
+            <a:schemeClr val="accent1"/>
+          </a:lnRef>
+          <a:fillRef idx="3">
+            <a:schemeClr val="accent1"/>
+          </a:fillRef>
+          <a:effectRef idx="2">
+            <a:schemeClr val="accent1"/>
+          </a:effectRef>
+          <a:fontRef idx="minor">
+            <a:schemeClr val="lt1"/>
+          </a:fontRef>
+        </p:style>
+        <p:txBody>
+          <a:bodyPr rtlCol="0" anchor="ctr"/>
+          <a:lstStyle/>
+          <a:p>
+            <a:pPr algn="ctr"/>
+          </a:p>
+        </p:txBody>
+      </p:sp>
+      <p:sp>
+        <p:nvSpPr>
+          <p:cNvPr id="117" name="Rectangle 116"/>
+          <p:cNvSpPr/>
+          <p:nvPr/>
+        </p:nvSpPr>
+        <p:spPr>
+          <a:xfrm>
+            <a:off x="4834890" y="943546"/>
+            <a:ext cx="33020" cy="33020"/>
+          </a:xfrm>
+          <a:prstGeom prst="rect">
+            <a:avLst/>
+          </a:prstGeom>
+          <a:solidFill>
+            <a:srgbClr val="19704F"/>
+          </a:solidFill>
+          <a:ln w="6350">
+            <a:solidFill>
+              <a:srgbClr val="FFFFFF"/>
+            </a:solidFill>
+          </a:ln>
+          <a:effectLst/>
+        </p:spPr>
+        <p:style>
+          <a:lnRef idx="1">
+            <a:schemeClr val="accent1"/>
+          </a:lnRef>
+          <a:fillRef idx="3">
+            <a:schemeClr val="accent1"/>
+          </a:fillRef>
+          <a:effectRef idx="2">
+            <a:schemeClr val="accent1"/>
+          </a:effectRef>
+          <a:fontRef idx="minor">
+            <a:schemeClr val="lt1"/>
+          </a:fontRef>
+        </p:style>
+        <p:txBody>
+          <a:bodyPr rtlCol="0" anchor="ctr"/>
+          <a:lstStyle/>
+          <a:p>
+            <a:pPr algn="ctr"/>
+          </a:p>
+        </p:txBody>
+      </p:sp>
+      <p:sp>
+        <p:nvSpPr>
+          <p:cNvPr id="118" name="Freeform 117"/>
+          <p:cNvSpPr/>
+          <p:nvPr/>
+        </p:nvSpPr>
+        <p:spPr>
+          <a:xfrm>
+            <a:off x="3683000" y="1014419"/>
+            <a:ext cx="1168400" cy="171180"/>
+          </a:xfrm>
+          <a:custGeom>
+            <a:avLst/>
+            <a:gdLst/>
+            <a:ahLst/>
+            <a:cxnLst/>
+            <a:rect l="l" t="t" r="r" b="b"/>
+            <a:pathLst>
+              <a:path w="1168400" h="171180">
+                <a:moveTo>
+                  <a:pt x="0" y="171180"/>
+                </a:moveTo>
+                <a:lnTo>
+                  <a:pt x="584200" y="44430"/>
+                </a:lnTo>
+                <a:lnTo>
+                  <a:pt x="1168400" y="0"/>
+                </a:lnTo>
+              </a:path>
+            </a:pathLst>
+          </a:custGeom>
+          <a:noFill/>
+          <a:ln w="10160">
+            <a:solidFill>
+              <a:srgbClr val="AD2B2B"/>
+            </a:solidFill>
+          </a:ln>
+          <a:effectLst/>
+        </p:spPr>
+        <p:style>
+          <a:lnRef idx="1">
+            <a:schemeClr val="accent1"/>
+          </a:lnRef>
+          <a:fillRef idx="3">
+            <a:schemeClr val="accent1"/>
+          </a:fillRef>
+          <a:effectRef idx="2">
+            <a:schemeClr val="accent1"/>
+          </a:effectRef>
+          <a:fontRef idx="minor">
+            <a:schemeClr val="lt1"/>
+          </a:fontRef>
+        </p:style>
+        <p:txBody>
+          <a:bodyPr rtlCol="0" anchor="ctr"/>
+          <a:lstStyle/>
+          <a:p>
+            <a:pPr algn="ctr"/>
+          </a:p>
+        </p:txBody>
+      </p:sp>
+      <p:sp>
+        <p:nvSpPr>
+          <p:cNvPr id="119" name="Rectangle 118"/>
+          <p:cNvSpPr/>
+          <p:nvPr/>
+        </p:nvSpPr>
+        <p:spPr>
+          <a:xfrm>
+            <a:off x="3666490" y="1169089"/>
+            <a:ext cx="33020" cy="33020"/>
+          </a:xfrm>
+          <a:prstGeom prst="rect">
+            <a:avLst/>
+          </a:prstGeom>
+          <a:solidFill>
+            <a:srgbClr val="AD2B2B"/>
+          </a:solidFill>
+          <a:ln w="6350">
+            <a:solidFill>
+              <a:srgbClr val="FFFFFF"/>
+            </a:solidFill>
+          </a:ln>
+          <a:effectLst/>
+        </p:spPr>
+        <p:style>
+          <a:lnRef idx="1">
+            <a:schemeClr val="accent1"/>
+          </a:lnRef>
+          <a:fillRef idx="3">
+            <a:schemeClr val="accent1"/>
+          </a:fillRef>
+          <a:effectRef idx="2">
+            <a:schemeClr val="accent1"/>
+          </a:effectRef>
+          <a:fontRef idx="minor">
+            <a:schemeClr val="lt1"/>
+          </a:fontRef>
+        </p:style>
+        <p:txBody>
+          <a:bodyPr rtlCol="0" anchor="ctr"/>
+          <a:lstStyle/>
+          <a:p>
+            <a:pPr algn="ctr"/>
+          </a:p>
+        </p:txBody>
+      </p:sp>
+      <p:sp>
+        <p:nvSpPr>
+          <p:cNvPr id="120" name="Rectangle 119"/>
+          <p:cNvSpPr/>
+          <p:nvPr/>
+        </p:nvSpPr>
+        <p:spPr>
+          <a:xfrm>
+            <a:off x="4250690" y="1042339"/>
+            <a:ext cx="33020" cy="33020"/>
+          </a:xfrm>
+          <a:prstGeom prst="rect">
+            <a:avLst/>
+          </a:prstGeom>
+          <a:solidFill>
+            <a:srgbClr val="AD2B2B"/>
+          </a:solidFill>
+          <a:ln w="6350">
+            <a:solidFill>
+              <a:srgbClr val="FFFFFF"/>
+            </a:solidFill>
+          </a:ln>
+          <a:effectLst/>
+        </p:spPr>
+        <p:style>
+          <a:lnRef idx="1">
+            <a:schemeClr val="accent1"/>
+          </a:lnRef>
+          <a:fillRef idx="3">
+            <a:schemeClr val="accent1"/>
+          </a:fillRef>
+          <a:effectRef idx="2">
+            <a:schemeClr val="accent1"/>
+          </a:effectRef>
+          <a:fontRef idx="minor">
+            <a:schemeClr val="lt1"/>
+          </a:fontRef>
+        </p:style>
+        <p:txBody>
+          <a:bodyPr rtlCol="0" anchor="ctr"/>
+          <a:lstStyle/>
+          <a:p>
+            <a:pPr algn="ctr"/>
+          </a:p>
+        </p:txBody>
+      </p:sp>
+      <p:sp>
+        <p:nvSpPr>
+          <p:cNvPr id="121" name="Rectangle 120"/>
+          <p:cNvSpPr/>
+          <p:nvPr/>
+        </p:nvSpPr>
+        <p:spPr>
+          <a:xfrm>
+            <a:off x="4834890" y="997909"/>
+            <a:ext cx="33020" cy="33020"/>
+          </a:xfrm>
+          <a:prstGeom prst="rect">
+            <a:avLst/>
+          </a:prstGeom>
+          <a:solidFill>
+            <a:srgbClr val="AD2B2B"/>
+          </a:solidFill>
+          <a:ln w="6350">
+            <a:solidFill>
+              <a:srgbClr val="FFFFFF"/>
+            </a:solidFill>
+          </a:ln>
+          <a:effectLst/>
+        </p:spPr>
+        <p:style>
+          <a:lnRef idx="1">
+            <a:schemeClr val="accent1"/>
+          </a:lnRef>
+          <a:fillRef idx="3">
+            <a:schemeClr val="accent1"/>
+          </a:fillRef>
+          <a:effectRef idx="2">
+            <a:schemeClr val="accent1"/>
+          </a:effectRef>
+          <a:fontRef idx="minor">
+            <a:schemeClr val="lt1"/>
+          </a:fontRef>
+        </p:style>
+        <p:txBody>
+          <a:bodyPr rtlCol="0" anchor="ctr"/>
+          <a:lstStyle/>
+          <a:p>
+            <a:pPr algn="ctr"/>
+          </a:p>
+        </p:txBody>
+      </p:sp>
+      <p:sp>
+        <p:nvSpPr>
+          <p:cNvPr id="122" name="Freeform 121"/>
+          <p:cNvSpPr/>
+          <p:nvPr/>
+        </p:nvSpPr>
+        <p:spPr>
+          <a:xfrm>
+            <a:off x="3683000" y="1222625"/>
+            <a:ext cx="1168400" cy="35301"/>
+          </a:xfrm>
+          <a:custGeom>
+            <a:avLst/>
+            <a:gdLst/>
+            <a:ahLst/>
+            <a:cxnLst/>
+            <a:rect l="l" t="t" r="r" b="b"/>
+            <a:pathLst>
+              <a:path w="1168400" h="35301">
+                <a:moveTo>
+                  <a:pt x="0" y="0"/>
+                </a:moveTo>
+                <a:lnTo>
+                  <a:pt x="584200" y="35301"/>
+                </a:lnTo>
+                <a:lnTo>
+                  <a:pt x="1168400" y="16220"/>
+                </a:lnTo>
+              </a:path>
+            </a:pathLst>
+          </a:custGeom>
+          <a:noFill/>
+          <a:ln w="10160">
+            <a:solidFill>
+              <a:srgbClr val="9EA5AD"/>
+            </a:solidFill>
+          </a:ln>
+          <a:effectLst/>
+        </p:spPr>
+        <p:style>
+          <a:lnRef idx="1">
+            <a:schemeClr val="accent1"/>
+          </a:lnRef>
+          <a:fillRef idx="3">
+            <a:schemeClr val="accent1"/>
+          </a:fillRef>
+          <a:effectRef idx="2">
+            <a:schemeClr val="accent1"/>
+          </a:effectRef>
+          <a:fontRef idx="minor">
+            <a:schemeClr val="lt1"/>
+          </a:fontRef>
+        </p:style>
+        <p:txBody>
+          <a:bodyPr rtlCol="0" anchor="ctr"/>
+          <a:lstStyle/>
+          <a:p>
+            <a:pPr algn="ctr"/>
+          </a:p>
+        </p:txBody>
+      </p:sp>
+      <p:sp>
+        <p:nvSpPr>
+          <p:cNvPr id="123" name="Rectangle 122"/>
+          <p:cNvSpPr/>
+          <p:nvPr/>
+        </p:nvSpPr>
+        <p:spPr>
+          <a:xfrm>
+            <a:off x="3666490" y="1206115"/>
+            <a:ext cx="33020" cy="33020"/>
+          </a:xfrm>
+          <a:prstGeom prst="rect">
+            <a:avLst/>
+          </a:prstGeom>
+          <a:solidFill>
+            <a:srgbClr val="9EA5AD"/>
+          </a:solidFill>
+          <a:ln w="6350">
+            <a:solidFill>
+              <a:srgbClr val="FFFFFF"/>
+            </a:solidFill>
+          </a:ln>
+          <a:effectLst/>
+        </p:spPr>
+        <p:style>
+          <a:lnRef idx="1">
+            <a:schemeClr val="accent1"/>
+          </a:lnRef>
+          <a:fillRef idx="3">
+            <a:schemeClr val="accent1"/>
+          </a:fillRef>
+          <a:effectRef idx="2">
+            <a:schemeClr val="accent1"/>
+          </a:effectRef>
+          <a:fontRef idx="minor">
+            <a:schemeClr val="lt1"/>
+          </a:fontRef>
+        </p:style>
+        <p:txBody>
+          <a:bodyPr rtlCol="0" anchor="ctr"/>
+          <a:lstStyle/>
+          <a:p>
+            <a:pPr algn="ctr"/>
+          </a:p>
+        </p:txBody>
+      </p:sp>
+      <p:sp>
+        <p:nvSpPr>
+          <p:cNvPr id="124" name="Rectangle 123"/>
+          <p:cNvSpPr/>
+          <p:nvPr/>
+        </p:nvSpPr>
+        <p:spPr>
+          <a:xfrm>
+            <a:off x="4250690" y="1241416"/>
+            <a:ext cx="33020" cy="33020"/>
+          </a:xfrm>
+          <a:prstGeom prst="rect">
+            <a:avLst/>
+          </a:prstGeom>
+          <a:solidFill>
+            <a:srgbClr val="9EA5AD"/>
+          </a:solidFill>
+          <a:ln w="6350">
+            <a:solidFill>
+              <a:srgbClr val="FFFFFF"/>
+            </a:solidFill>
+          </a:ln>
+          <a:effectLst/>
+        </p:spPr>
+        <p:style>
+          <a:lnRef idx="1">
+            <a:schemeClr val="accent1"/>
+          </a:lnRef>
+          <a:fillRef idx="3">
+            <a:schemeClr val="accent1"/>
+          </a:fillRef>
+          <a:effectRef idx="2">
+            <a:schemeClr val="accent1"/>
+          </a:effectRef>
+          <a:fontRef idx="minor">
+            <a:schemeClr val="lt1"/>
+          </a:fontRef>
+        </p:style>
+        <p:txBody>
+          <a:bodyPr rtlCol="0" anchor="ctr"/>
+          <a:lstStyle/>
+          <a:p>
+            <a:pPr algn="ctr"/>
+          </a:p>
+        </p:txBody>
+      </p:sp>
+      <p:sp>
+        <p:nvSpPr>
+          <p:cNvPr id="125" name="Rectangle 124"/>
+          <p:cNvSpPr/>
+          <p:nvPr/>
+        </p:nvSpPr>
+        <p:spPr>
+          <a:xfrm>
+            <a:off x="4834890" y="1222335"/>
+            <a:ext cx="33020" cy="33020"/>
+          </a:xfrm>
+          <a:prstGeom prst="rect">
+            <a:avLst/>
+          </a:prstGeom>
+          <a:solidFill>
+            <a:srgbClr val="9EA5AD"/>
+          </a:solidFill>
+          <a:ln w="6350">
+            <a:solidFill>
+              <a:srgbClr val="FFFFFF"/>
+            </a:solidFill>
+          </a:ln>
+          <a:effectLst/>
+        </p:spPr>
+        <p:style>
+          <a:lnRef idx="1">
+            <a:schemeClr val="accent1"/>
+          </a:lnRef>
+          <a:fillRef idx="3">
+            <a:schemeClr val="accent1"/>
+          </a:fillRef>
+          <a:effectRef idx="2">
+            <a:schemeClr val="accent1"/>
+          </a:effectRef>
+          <a:fontRef idx="minor">
+            <a:schemeClr val="lt1"/>
+          </a:fontRef>
+        </p:style>
+        <p:txBody>
+          <a:bodyPr rtlCol="0" anchor="ctr"/>
+          <a:lstStyle/>
+          <a:p>
+            <a:pPr algn="ctr"/>
+          </a:p>
+        </p:txBody>
+      </p:sp>
+      <p:sp>
+        <p:nvSpPr>
+          <p:cNvPr id="126" name="Rectangle 125"/>
+          <p:cNvSpPr/>
+          <p:nvPr/>
+        </p:nvSpPr>
+        <p:spPr>
+          <a:xfrm>
+            <a:off x="381000" y="1879600"/>
+            <a:ext cx="50800" cy="50800"/>
+          </a:xfrm>
+          <a:prstGeom prst="rect">
+            <a:avLst/>
+          </a:prstGeom>
+          <a:solidFill>
+            <a:srgbClr val="215499"/>
+          </a:solidFill>
+          <a:ln>
+            <a:noFill/>
+          </a:ln>
+          <a:effectLst/>
+        </p:spPr>
+        <p:style>
+          <a:lnRef idx="1">
+            <a:schemeClr val="accent1"/>
+          </a:lnRef>
+          <a:fillRef idx="3">
+            <a:schemeClr val="accent1"/>
+          </a:fillRef>
+          <a:effectRef idx="2">
+            <a:schemeClr val="accent1"/>
+          </a:effectRef>
+          <a:fontRef idx="minor">
+            <a:schemeClr val="lt1"/>
+          </a:fontRef>
+        </p:style>
+        <p:txBody>
+          <a:bodyPr rtlCol="0" anchor="ctr"/>
+          <a:lstStyle/>
+          <a:p>
+            <a:pPr algn="ctr"/>
+          </a:p>
+        </p:txBody>
+      </p:sp>
+      <p:sp>
+        <p:nvSpPr>
+          <p:cNvPr id="127" name="TextBox 126"/>
           <p:cNvSpPr txBox="1"/>
           <p:nvPr/>
         </p:nvSpPr>
         <p:spPr>
           <a:xfrm>
-            <a:off x="2717800" y="1059688"/>
-            <a:ext cx="3048000" cy="170688"/>
+            <a:off x="-1066800" y="1844675"/>
+            <a:ext cx="3048000" cy="152400"/>
           </a:xfrm>
           <a:prstGeom prst="rect">
             <a:avLst/>
@@ -5003,29 +8382,73 @@
           </a:bodyPr>
           <a:lstStyle/>
           <a:p>
-            <a:pPr algn="ctr"/>
-            <a:r>
-              <a:rPr sz="560" b="0" i="0">
+            <a:pPr algn="l"/>
+            <a:r>
+              <a:rPr sz="500" b="0" i="0">
                 <a:solidFill>
-                  <a:srgbClr val="AD2B2B"/>
+                  <a:srgbClr val="1C1E23"/>
                 </a:solidFill>
                 <a:latin typeface="Helvetica"/>
               </a:rPr>
-              <a:t>[FIG-ROBUST-CHRONOS2]</a:t>
-            </a:r>
-          </a:p>
-        </p:txBody>
-      </p:sp>
-      <p:sp>
-        <p:nvSpPr>
-          <p:cNvPr id="57" name="TextBox 56"/>
+              <a:t>IntroAct-TS</a:t>
+            </a:r>
+          </a:p>
+        </p:txBody>
+      </p:sp>
+      <p:sp>
+        <p:nvSpPr>
+          <p:cNvPr id="128" name="Rectangle 127"/>
+          <p:cNvSpPr/>
+          <p:nvPr/>
+        </p:nvSpPr>
+        <p:spPr>
+          <a:xfrm>
+            <a:off x="1082040" y="1879600"/>
+            <a:ext cx="50800" cy="50800"/>
+          </a:xfrm>
+          <a:prstGeom prst="rect">
+            <a:avLst/>
+          </a:prstGeom>
+          <a:solidFill>
+            <a:srgbClr val="AD6B0A"/>
+          </a:solidFill>
+          <a:ln>
+            <a:noFill/>
+          </a:ln>
+          <a:effectLst/>
+        </p:spPr>
+        <p:style>
+          <a:lnRef idx="1">
+            <a:schemeClr val="accent1"/>
+          </a:lnRef>
+          <a:fillRef idx="3">
+            <a:schemeClr val="accent1"/>
+          </a:fillRef>
+          <a:effectRef idx="2">
+            <a:schemeClr val="accent1"/>
+          </a:effectRef>
+          <a:fontRef idx="minor">
+            <a:schemeClr val="lt1"/>
+          </a:fontRef>
+        </p:style>
+        <p:txBody>
+          <a:bodyPr rtlCol="0" anchor="ctr"/>
+          <a:lstStyle/>
+          <a:p>
+            <a:pPr algn="ctr"/>
+          </a:p>
+        </p:txBody>
+      </p:sp>
+      <p:sp>
+        <p:nvSpPr>
+          <p:cNvPr id="129" name="TextBox 128"/>
           <p:cNvSpPr txBox="1"/>
           <p:nvPr/>
         </p:nvSpPr>
         <p:spPr>
           <a:xfrm>
-            <a:off x="990600" y="1790445"/>
-            <a:ext cx="3048000" cy="158496"/>
+            <a:off x="-365759" y="1844675"/>
+            <a:ext cx="3048000" cy="152400"/>
           </a:xfrm>
           <a:prstGeom prst="rect">
             <a:avLst/>
@@ -5038,15 +8461,287 @@
           </a:bodyPr>
           <a:lstStyle/>
           <a:p>
+            <a:pPr algn="l"/>
+            <a:r>
+              <a:rPr sz="500" b="0" i="0">
+                <a:solidFill>
+                  <a:srgbClr val="1C1E23"/>
+                </a:solidFill>
+                <a:latin typeface="Helvetica"/>
+              </a:rPr>
+              <a:t>Best Fixed</a:t>
+            </a:r>
+          </a:p>
+        </p:txBody>
+      </p:sp>
+      <p:sp>
+        <p:nvSpPr>
+          <p:cNvPr id="130" name="Rectangle 129"/>
+          <p:cNvSpPr/>
+          <p:nvPr/>
+        </p:nvSpPr>
+        <p:spPr>
+          <a:xfrm>
+            <a:off x="1742439" y="1879600"/>
+            <a:ext cx="50800" cy="50800"/>
+          </a:xfrm>
+          <a:prstGeom prst="rect">
+            <a:avLst/>
+          </a:prstGeom>
+          <a:solidFill>
+            <a:srgbClr val="19704F"/>
+          </a:solidFill>
+          <a:ln>
+            <a:noFill/>
+          </a:ln>
+          <a:effectLst/>
+        </p:spPr>
+        <p:style>
+          <a:lnRef idx="1">
+            <a:schemeClr val="accent1"/>
+          </a:lnRef>
+          <a:fillRef idx="3">
+            <a:schemeClr val="accent1"/>
+          </a:fillRef>
+          <a:effectRef idx="2">
+            <a:schemeClr val="accent1"/>
+          </a:effectRef>
+          <a:fontRef idx="minor">
+            <a:schemeClr val="lt1"/>
+          </a:fontRef>
+        </p:style>
+        <p:txBody>
+          <a:bodyPr rtlCol="0" anchor="ctr"/>
+          <a:lstStyle/>
+          <a:p>
             <a:pPr algn="ctr"/>
-            <a:r>
-              <a:rPr sz="520" b="0" i="0">
+          </a:p>
+        </p:txBody>
+      </p:sp>
+      <p:sp>
+        <p:nvSpPr>
+          <p:cNvPr id="131" name="TextBox 130"/>
+          <p:cNvSpPr txBox="1"/>
+          <p:nvPr/>
+        </p:nvSpPr>
+        <p:spPr>
+          <a:xfrm>
+            <a:off x="294639" y="1844675"/>
+            <a:ext cx="3048000" cy="152400"/>
+          </a:xfrm>
+          <a:prstGeom prst="rect">
+            <a:avLst/>
+          </a:prstGeom>
+          <a:noFill/>
+        </p:spPr>
+        <p:txBody>
+          <a:bodyPr wrap="none" lIns="0" rIns="0" tIns="0" bIns="0" anchor="ctr">
+            <a:spAutoFit/>
+          </a:bodyPr>
+          <a:lstStyle/>
+          <a:p>
+            <a:pPr algn="l"/>
+            <a:r>
+              <a:rPr sz="500" b="0" i="0">
+                <a:solidFill>
+                  <a:srgbClr val="1C1E23"/>
+                </a:solidFill>
+                <a:latin typeface="Helvetica"/>
+              </a:rPr>
+              <a:t>R2-CART</a:t>
+            </a:r>
+          </a:p>
+        </p:txBody>
+      </p:sp>
+      <p:sp>
+        <p:nvSpPr>
+          <p:cNvPr id="132" name="Rectangle 131"/>
+          <p:cNvSpPr/>
+          <p:nvPr/>
+        </p:nvSpPr>
+        <p:spPr>
+          <a:xfrm>
+            <a:off x="2280920" y="1879600"/>
+            <a:ext cx="50800" cy="50800"/>
+          </a:xfrm>
+          <a:prstGeom prst="rect">
+            <a:avLst/>
+          </a:prstGeom>
+          <a:solidFill>
+            <a:srgbClr val="AD2B2B"/>
+          </a:solidFill>
+          <a:ln>
+            <a:noFill/>
+          </a:ln>
+          <a:effectLst/>
+        </p:spPr>
+        <p:style>
+          <a:lnRef idx="1">
+            <a:schemeClr val="accent1"/>
+          </a:lnRef>
+          <a:fillRef idx="3">
+            <a:schemeClr val="accent1"/>
+          </a:fillRef>
+          <a:effectRef idx="2">
+            <a:schemeClr val="accent1"/>
+          </a:effectRef>
+          <a:fontRef idx="minor">
+            <a:schemeClr val="lt1"/>
+          </a:fontRef>
+        </p:style>
+        <p:txBody>
+          <a:bodyPr rtlCol="0" anchor="ctr"/>
+          <a:lstStyle/>
+          <a:p>
+            <a:pPr algn="ctr"/>
+          </a:p>
+        </p:txBody>
+      </p:sp>
+      <p:sp>
+        <p:nvSpPr>
+          <p:cNvPr id="133" name="TextBox 132"/>
+          <p:cNvSpPr txBox="1"/>
+          <p:nvPr/>
+        </p:nvSpPr>
+        <p:spPr>
+          <a:xfrm>
+            <a:off x="833119" y="1844675"/>
+            <a:ext cx="3048000" cy="152400"/>
+          </a:xfrm>
+          <a:prstGeom prst="rect">
+            <a:avLst/>
+          </a:prstGeom>
+          <a:noFill/>
+        </p:spPr>
+        <p:txBody>
+          <a:bodyPr wrap="none" lIns="0" rIns="0" tIns="0" bIns="0" anchor="ctr">
+            <a:spAutoFit/>
+          </a:bodyPr>
+          <a:lstStyle/>
+          <a:p>
+            <a:pPr algn="l"/>
+            <a:r>
+              <a:rPr sz="500" b="0" i="0">
+                <a:solidFill>
+                  <a:srgbClr val="1C1E23"/>
+                </a:solidFill>
+                <a:latin typeface="Helvetica"/>
+              </a:rPr>
+              <a:t>SAITS</a:t>
+            </a:r>
+          </a:p>
+        </p:txBody>
+      </p:sp>
+      <p:sp>
+        <p:nvSpPr>
+          <p:cNvPr id="134" name="Rectangle 133"/>
+          <p:cNvSpPr/>
+          <p:nvPr/>
+        </p:nvSpPr>
+        <p:spPr>
+          <a:xfrm>
+            <a:off x="2738120" y="1879600"/>
+            <a:ext cx="50800" cy="50800"/>
+          </a:xfrm>
+          <a:prstGeom prst="rect">
+            <a:avLst/>
+          </a:prstGeom>
+          <a:solidFill>
+            <a:srgbClr val="9EA5AD"/>
+          </a:solidFill>
+          <a:ln>
+            <a:noFill/>
+          </a:ln>
+          <a:effectLst/>
+        </p:spPr>
+        <p:style>
+          <a:lnRef idx="1">
+            <a:schemeClr val="accent1"/>
+          </a:lnRef>
+          <a:fillRef idx="3">
+            <a:schemeClr val="accent1"/>
+          </a:fillRef>
+          <a:effectRef idx="2">
+            <a:schemeClr val="accent1"/>
+          </a:effectRef>
+          <a:fontRef idx="minor">
+            <a:schemeClr val="lt1"/>
+          </a:fontRef>
+        </p:style>
+        <p:txBody>
+          <a:bodyPr rtlCol="0" anchor="ctr"/>
+          <a:lstStyle/>
+          <a:p>
+            <a:pPr algn="ctr"/>
+          </a:p>
+        </p:txBody>
+      </p:sp>
+      <p:sp>
+        <p:nvSpPr>
+          <p:cNvPr id="135" name="TextBox 134"/>
+          <p:cNvSpPr txBox="1"/>
+          <p:nvPr/>
+        </p:nvSpPr>
+        <p:spPr>
+          <a:xfrm>
+            <a:off x="1290320" y="1844675"/>
+            <a:ext cx="3048000" cy="152400"/>
+          </a:xfrm>
+          <a:prstGeom prst="rect">
+            <a:avLst/>
+          </a:prstGeom>
+          <a:noFill/>
+        </p:spPr>
+        <p:txBody>
+          <a:bodyPr wrap="none" lIns="0" rIns="0" tIns="0" bIns="0" anchor="ctr">
+            <a:spAutoFit/>
+          </a:bodyPr>
+          <a:lstStyle/>
+          <a:p>
+            <a:pPr algn="l"/>
+            <a:r>
+              <a:rPr sz="500" b="0" i="0">
+                <a:solidFill>
+                  <a:srgbClr val="1C1E23"/>
+                </a:solidFill>
+                <a:latin typeface="Helvetica"/>
+              </a:rPr>
+              <a:t>TATO</a:t>
+            </a:r>
+          </a:p>
+        </p:txBody>
+      </p:sp>
+      <p:sp>
+        <p:nvSpPr>
+          <p:cNvPr id="136" name="TextBox 135"/>
+          <p:cNvSpPr txBox="1"/>
+          <p:nvPr/>
+        </p:nvSpPr>
+        <p:spPr>
+          <a:xfrm>
+            <a:off x="990600" y="2035175"/>
+            <a:ext cx="3048000" cy="152400"/>
+          </a:xfrm>
+          <a:prstGeom prst="rect">
+            <a:avLst/>
+          </a:prstGeom>
+          <a:noFill/>
+        </p:spPr>
+        <p:txBody>
+          <a:bodyPr wrap="none" lIns="0" rIns="0" tIns="0" bIns="0" anchor="ctr">
+            <a:spAutoFit/>
+          </a:bodyPr>
+          <a:lstStyle/>
+          <a:p>
+            <a:pPr algn="ctr"/>
+            <a:r>
+              <a:rPr sz="500" b="0" i="0">
                 <a:solidFill>
                   <a:srgbClr val="6B727C"/>
                 </a:solidFill>
                 <a:latin typeface="Helvetica"/>
               </a:rPr>
-              <a:t>Each line is one method; all methods reuse the models and rules frozen on TRAIN, with no per-severity retuning.</a:t>
+              <a:t>Every method reuses the rule frozen on TRAIN, with no retuning between levels.</a:t>
             </a:r>
           </a:p>
         </p:txBody>
